--- a/Microservices/05.09. Service Mesh.pptx
+++ b/Microservices/05.09. Service Mesh.pptx
@@ -5,62 +5,64 @@
     <p:sldMasterId id="2147483708" r:id="rId1"/>
   </p:sldMasterIdLst>
   <p:notesMasterIdLst>
-    <p:notesMasterId r:id="rId55"/>
+    <p:notesMasterId r:id="rId57"/>
   </p:notesMasterIdLst>
   <p:sldIdLst>
     <p:sldId id="256" r:id="rId2"/>
     <p:sldId id="349" r:id="rId3"/>
     <p:sldId id="396" r:id="rId4"/>
     <p:sldId id="344" r:id="rId5"/>
-    <p:sldId id="397" r:id="rId6"/>
-    <p:sldId id="398" r:id="rId7"/>
-    <p:sldId id="399" r:id="rId8"/>
-    <p:sldId id="401" r:id="rId9"/>
-    <p:sldId id="402" r:id="rId10"/>
-    <p:sldId id="403" r:id="rId11"/>
-    <p:sldId id="434" r:id="rId12"/>
+    <p:sldId id="398" r:id="rId6"/>
+    <p:sldId id="399" r:id="rId7"/>
+    <p:sldId id="401" r:id="rId8"/>
+    <p:sldId id="402" r:id="rId9"/>
+    <p:sldId id="403" r:id="rId10"/>
+    <p:sldId id="452" r:id="rId11"/>
+    <p:sldId id="451" r:id="rId12"/>
     <p:sldId id="404" r:id="rId13"/>
     <p:sldId id="405" r:id="rId14"/>
     <p:sldId id="406" r:id="rId15"/>
     <p:sldId id="407" r:id="rId16"/>
-    <p:sldId id="408" r:id="rId17"/>
-    <p:sldId id="409" r:id="rId18"/>
-    <p:sldId id="410" r:id="rId19"/>
-    <p:sldId id="411" r:id="rId20"/>
-    <p:sldId id="412" r:id="rId21"/>
-    <p:sldId id="413" r:id="rId22"/>
-    <p:sldId id="418" r:id="rId23"/>
-    <p:sldId id="419" r:id="rId24"/>
-    <p:sldId id="420" r:id="rId25"/>
-    <p:sldId id="421" r:id="rId26"/>
-    <p:sldId id="422" r:id="rId27"/>
-    <p:sldId id="423" r:id="rId28"/>
-    <p:sldId id="424" r:id="rId29"/>
-    <p:sldId id="425" r:id="rId30"/>
-    <p:sldId id="426" r:id="rId31"/>
-    <p:sldId id="427" r:id="rId32"/>
-    <p:sldId id="428" r:id="rId33"/>
-    <p:sldId id="429" r:id="rId34"/>
-    <p:sldId id="430" r:id="rId35"/>
-    <p:sldId id="431" r:id="rId36"/>
-    <p:sldId id="432" r:id="rId37"/>
-    <p:sldId id="433" r:id="rId38"/>
-    <p:sldId id="435" r:id="rId39"/>
-    <p:sldId id="436" r:id="rId40"/>
-    <p:sldId id="437" r:id="rId41"/>
-    <p:sldId id="438" r:id="rId42"/>
-    <p:sldId id="440" r:id="rId43"/>
-    <p:sldId id="441" r:id="rId44"/>
-    <p:sldId id="442" r:id="rId45"/>
-    <p:sldId id="443" r:id="rId46"/>
-    <p:sldId id="444" r:id="rId47"/>
-    <p:sldId id="445" r:id="rId48"/>
-    <p:sldId id="446" r:id="rId49"/>
-    <p:sldId id="447" r:id="rId50"/>
-    <p:sldId id="448" r:id="rId51"/>
-    <p:sldId id="449" r:id="rId52"/>
-    <p:sldId id="450" r:id="rId53"/>
-    <p:sldId id="343" r:id="rId54"/>
+    <p:sldId id="454" r:id="rId17"/>
+    <p:sldId id="455" r:id="rId18"/>
+    <p:sldId id="408" r:id="rId19"/>
+    <p:sldId id="409" r:id="rId20"/>
+    <p:sldId id="410" r:id="rId21"/>
+    <p:sldId id="411" r:id="rId22"/>
+    <p:sldId id="412" r:id="rId23"/>
+    <p:sldId id="413" r:id="rId24"/>
+    <p:sldId id="418" r:id="rId25"/>
+    <p:sldId id="453" r:id="rId26"/>
+    <p:sldId id="420" r:id="rId27"/>
+    <p:sldId id="421" r:id="rId28"/>
+    <p:sldId id="422" r:id="rId29"/>
+    <p:sldId id="423" r:id="rId30"/>
+    <p:sldId id="424" r:id="rId31"/>
+    <p:sldId id="425" r:id="rId32"/>
+    <p:sldId id="426" r:id="rId33"/>
+    <p:sldId id="427" r:id="rId34"/>
+    <p:sldId id="428" r:id="rId35"/>
+    <p:sldId id="429" r:id="rId36"/>
+    <p:sldId id="430" r:id="rId37"/>
+    <p:sldId id="431" r:id="rId38"/>
+    <p:sldId id="432" r:id="rId39"/>
+    <p:sldId id="433" r:id="rId40"/>
+    <p:sldId id="435" r:id="rId41"/>
+    <p:sldId id="436" r:id="rId42"/>
+    <p:sldId id="437" r:id="rId43"/>
+    <p:sldId id="438" r:id="rId44"/>
+    <p:sldId id="440" r:id="rId45"/>
+    <p:sldId id="441" r:id="rId46"/>
+    <p:sldId id="442" r:id="rId47"/>
+    <p:sldId id="443" r:id="rId48"/>
+    <p:sldId id="444" r:id="rId49"/>
+    <p:sldId id="445" r:id="rId50"/>
+    <p:sldId id="446" r:id="rId51"/>
+    <p:sldId id="447" r:id="rId52"/>
+    <p:sldId id="448" r:id="rId53"/>
+    <p:sldId id="449" r:id="rId54"/>
+    <p:sldId id="450" r:id="rId55"/>
+    <p:sldId id="343" r:id="rId56"/>
   </p:sldIdLst>
   <p:sldSz cx="9144000" cy="6858000" type="screen4x3"/>
   <p:notesSz cx="6858000" cy="9144000"/>
@@ -275,7 +277,7 @@
             <a:fld id="{53FB1E61-C19C-4EB9-A84C-BFF45D303BF2}" type="datetimeFigureOut">
               <a:rPr lang="en-US" smtClean="0"/>
               <a:pPr/>
-              <a:t>12/15/2025</a:t>
+              <a:t>7/7/2026</a:t>
             </a:fld>
             <a:endParaRPr lang="en-US"/>
           </a:p>
@@ -732,7 +734,7 @@
               <a:pPr>
                 <a:defRPr/>
               </a:pPr>
-              <a:t>12/15/2025</a:t>
+              <a:t>7/7/2026</a:t>
             </a:fld>
             <a:endParaRPr lang="en-US"/>
           </a:p>
@@ -924,7 +926,7 @@
               <a:pPr>
                 <a:defRPr/>
               </a:pPr>
-              <a:t>12/15/2025</a:t>
+              <a:t>7/7/2026</a:t>
             </a:fld>
             <a:endParaRPr lang="en-US"/>
           </a:p>
@@ -1126,7 +1128,7 @@
               <a:pPr>
                 <a:defRPr/>
               </a:pPr>
-              <a:t>12/15/2025</a:t>
+              <a:t>7/7/2026</a:t>
             </a:fld>
             <a:endParaRPr lang="en-US"/>
           </a:p>
@@ -1318,7 +1320,7 @@
               <a:pPr>
                 <a:defRPr/>
               </a:pPr>
-              <a:t>12/15/2025</a:t>
+              <a:t>7/7/2026</a:t>
             </a:fld>
             <a:endParaRPr lang="en-US"/>
           </a:p>
@@ -1586,7 +1588,7 @@
               <a:pPr>
                 <a:defRPr/>
               </a:pPr>
-              <a:t>12/15/2025</a:t>
+              <a:t>7/7/2026</a:t>
             </a:fld>
             <a:endParaRPr lang="en-US"/>
           </a:p>
@@ -1896,7 +1898,7 @@
               <a:pPr>
                 <a:defRPr/>
               </a:pPr>
-              <a:t>12/15/2025</a:t>
+              <a:t>7/7/2026</a:t>
             </a:fld>
             <a:endParaRPr lang="en-US"/>
           </a:p>
@@ -2340,7 +2342,7 @@
               <a:pPr>
                 <a:defRPr/>
               </a:pPr>
-              <a:t>12/15/2025</a:t>
+              <a:t>7/7/2026</a:t>
             </a:fld>
             <a:endParaRPr lang="en-US"/>
           </a:p>
@@ -2480,7 +2482,7 @@
               <a:pPr>
                 <a:defRPr/>
               </a:pPr>
-              <a:t>12/15/2025</a:t>
+              <a:t>7/7/2026</a:t>
             </a:fld>
             <a:endParaRPr lang="en-US"/>
           </a:p>
@@ -2597,7 +2599,7 @@
               <a:pPr>
                 <a:defRPr/>
               </a:pPr>
-              <a:t>12/15/2025</a:t>
+              <a:t>7/7/2026</a:t>
             </a:fld>
             <a:endParaRPr lang="en-US"/>
           </a:p>
@@ -2896,7 +2898,7 @@
               <a:pPr>
                 <a:defRPr/>
               </a:pPr>
-              <a:t>12/15/2025</a:t>
+              <a:t>7/7/2026</a:t>
             </a:fld>
             <a:endParaRPr lang="en-US"/>
           </a:p>
@@ -3174,7 +3176,7 @@
               <a:pPr>
                 <a:defRPr/>
               </a:pPr>
-              <a:t>12/15/2025</a:t>
+              <a:t>7/7/2026</a:t>
             </a:fld>
             <a:endParaRPr lang="en-US"/>
           </a:p>
@@ -3422,7 +3424,7 @@
               <a:pPr>
                 <a:defRPr/>
               </a:pPr>
-              <a:t>12/15/2025</a:t>
+              <a:t>7/7/2026</a:t>
             </a:fld>
             <a:endParaRPr lang="en-US"/>
           </a:p>
@@ -4083,147 +4085,6 @@
           <a:chExt cx="0" cy="0"/>
         </a:xfrm>
       </p:grpSpPr>
-      <p:sp>
-        <p:nvSpPr>
-          <p:cNvPr id="2" name="Title 1"/>
-          <p:cNvSpPr>
-            <a:spLocks noGrp="1"/>
-          </p:cNvSpPr>
-          <p:nvPr>
-            <p:ph type="title"/>
-          </p:nvPr>
-        </p:nvSpPr>
-        <p:spPr/>
-        <p:txBody>
-          <a:bodyPr/>
-          <a:lstStyle/>
-          <a:p>
-            <a:r>
-              <a:rPr lang="en-US" dirty="0" smtClean="0"/>
-              <a:t>Enablement Technologies</a:t>
-            </a:r>
-            <a:endParaRPr lang="en-US" dirty="0"/>
-          </a:p>
-        </p:txBody>
-      </p:sp>
-      <p:sp>
-        <p:nvSpPr>
-          <p:cNvPr id="3" name="Content Placeholder 2"/>
-          <p:cNvSpPr>
-            <a:spLocks noGrp="1"/>
-          </p:cNvSpPr>
-          <p:nvPr>
-            <p:ph idx="1"/>
-          </p:nvPr>
-        </p:nvSpPr>
-        <p:spPr/>
-        <p:txBody>
-          <a:bodyPr/>
-          <a:lstStyle/>
-          <a:p>
-            <a:r>
-              <a:rPr lang="en-US" sz="2400" dirty="0" err="1" smtClean="0"/>
-              <a:t>Istio</a:t>
-            </a:r>
-            <a:endParaRPr lang="en-US" sz="2400" dirty="0" smtClean="0"/>
-          </a:p>
-          <a:p>
-            <a:r>
-              <a:rPr lang="en-US" sz="2400" dirty="0" err="1" smtClean="0"/>
-              <a:t>Linkerd</a:t>
-            </a:r>
-            <a:endParaRPr lang="en-US" sz="2400" dirty="0" smtClean="0"/>
-          </a:p>
-          <a:p>
-            <a:r>
-              <a:rPr lang="en-US" sz="2400" dirty="0" err="1" smtClean="0"/>
-              <a:t>Airbnb</a:t>
-            </a:r>
-            <a:r>
-              <a:rPr lang="en-US" sz="2400" dirty="0" smtClean="0"/>
-              <a:t> Synapse</a:t>
-            </a:r>
-          </a:p>
-          <a:p>
-            <a:pPr lvl="1"/>
-            <a:r>
-              <a:rPr lang="en-US" sz="2000" dirty="0" smtClean="0"/>
-              <a:t>it solves the problem of automated failover through a simplistic but efficient, </a:t>
-            </a:r>
-            <a:r>
-              <a:rPr lang="en-US" sz="2000" dirty="0" err="1" smtClean="0"/>
-              <a:t>Zookeeperbased</a:t>
-            </a:r>
-            <a:r>
-              <a:rPr lang="en-US" sz="2000" dirty="0" smtClean="0"/>
-              <a:t> service discovery mechanism. In detail, Synapse configures a local </a:t>
-            </a:r>
-            <a:r>
-              <a:rPr lang="en-US" sz="2000" dirty="0" err="1" smtClean="0"/>
-              <a:t>HAProxy</a:t>
-            </a:r>
-            <a:r>
-              <a:rPr lang="en-US" sz="2000" dirty="0" smtClean="0"/>
-              <a:t> process using the information read from Zookeeper where states of the services are stored and continuously updated. By doing so, the local </a:t>
-            </a:r>
-            <a:r>
-              <a:rPr lang="en-US" sz="2000" dirty="0" err="1" smtClean="0"/>
-              <a:t>HAProxy</a:t>
-            </a:r>
-            <a:r>
-              <a:rPr lang="en-US" sz="2000" dirty="0" smtClean="0"/>
-              <a:t> can take care of properly routing the request from a service consumer. With an optimized </a:t>
-            </a:r>
-            <a:r>
-              <a:rPr lang="en-US" sz="2000" dirty="0" err="1" smtClean="0"/>
-              <a:t>HAProxy</a:t>
-            </a:r>
-            <a:r>
-              <a:rPr lang="en-US" sz="2000" dirty="0" smtClean="0"/>
-              <a:t>, Synapse can react to the change (e.g., service failure) in Zookeeper, and reconfigure </a:t>
-            </a:r>
-            <a:r>
-              <a:rPr lang="en-US" sz="2000" dirty="0" err="1" smtClean="0"/>
-              <a:t>HAProxy</a:t>
-            </a:r>
-            <a:r>
-              <a:rPr lang="en-US" sz="2000" dirty="0" smtClean="0"/>
-              <a:t> immediately.</a:t>
-            </a:r>
-          </a:p>
-          <a:p>
-            <a:r>
-              <a:rPr lang="en-US" sz="2400" dirty="0" smtClean="0"/>
-              <a:t>Amazon App Mesh</a:t>
-            </a:r>
-          </a:p>
-        </p:txBody>
-      </p:sp>
-    </p:spTree>
-  </p:cSld>
-  <p:clrMapOvr>
-    <a:masterClrMapping/>
-  </p:clrMapOvr>
-</p:sld>
-</file>
-
-<file path=ppt/slides/slide11.xml><?xml version="1.0" encoding="utf-8"?>
-<p:sld xmlns:a="http://schemas.openxmlformats.org/drawingml/2006/main" xmlns:r="http://schemas.openxmlformats.org/officeDocument/2006/relationships" xmlns:p="http://schemas.openxmlformats.org/presentationml/2006/main">
-  <p:cSld>
-    <p:spTree>
-      <p:nvGrpSpPr>
-        <p:cNvPr id="1" name=""/>
-        <p:cNvGrpSpPr/>
-        <p:nvPr/>
-      </p:nvGrpSpPr>
-      <p:grpSpPr>
-        <a:xfrm>
-          <a:off x="0" y="0"/>
-          <a:ext cx="0" cy="0"/>
-          <a:chOff x="0" y="0"/>
-          <a:chExt cx="0" cy="0"/>
-        </a:xfrm>
-      </p:grpSpPr>
       <p:pic>
         <p:nvPicPr>
           <p:cNvPr id="4" name="Picture 2" descr="https://lh3.ggpht.com/1IfZLL2QDSjZ0wS7sUhaMlsAOS8BBzdR3wZ1WawgRn7KZAM8nEVZYMOUM-lqQb0ikIzp=w300"/>
@@ -4250,6 +4111,158 @@
           <a:noFill/>
         </p:spPr>
       </p:pic>
+    </p:spTree>
+  </p:cSld>
+  <p:clrMapOvr>
+    <a:masterClrMapping/>
+  </p:clrMapOvr>
+</p:sld>
+</file>
+
+<file path=ppt/slides/slide11.xml><?xml version="1.0" encoding="utf-8"?>
+<p:sld xmlns:a="http://schemas.openxmlformats.org/drawingml/2006/main" xmlns:r="http://schemas.openxmlformats.org/officeDocument/2006/relationships" xmlns:p="http://schemas.openxmlformats.org/presentationml/2006/main">
+  <p:cSld>
+    <p:spTree>
+      <p:nvGrpSpPr>
+        <p:cNvPr id="1" name=""/>
+        <p:cNvGrpSpPr/>
+        <p:nvPr/>
+      </p:nvGrpSpPr>
+      <p:grpSpPr>
+        <a:xfrm>
+          <a:off x="0" y="0"/>
+          <a:ext cx="0" cy="0"/>
+          <a:chOff x="0" y="0"/>
+          <a:chExt cx="0" cy="0"/>
+        </a:xfrm>
+      </p:grpSpPr>
+      <p:sp>
+        <p:nvSpPr>
+          <p:cNvPr id="2" name="Title 1"/>
+          <p:cNvSpPr>
+            <a:spLocks noGrp="1"/>
+          </p:cNvSpPr>
+          <p:nvPr>
+            <p:ph type="title"/>
+          </p:nvPr>
+        </p:nvSpPr>
+        <p:spPr/>
+        <p:txBody>
+          <a:bodyPr/>
+          <a:lstStyle/>
+          <a:p>
+            <a:r>
+              <a:rPr lang="en-US" dirty="0" smtClean="0"/>
+              <a:t>Why Service Mesh?</a:t>
+            </a:r>
+            <a:endParaRPr lang="en-US" dirty="0"/>
+          </a:p>
+        </p:txBody>
+      </p:sp>
+      <p:sp>
+        <p:nvSpPr>
+          <p:cNvPr id="3" name="Content Placeholder 2"/>
+          <p:cNvSpPr>
+            <a:spLocks noGrp="1"/>
+          </p:cNvSpPr>
+          <p:nvPr>
+            <p:ph idx="1"/>
+          </p:nvPr>
+        </p:nvSpPr>
+        <p:spPr/>
+        <p:txBody>
+          <a:bodyPr/>
+          <a:lstStyle/>
+          <a:p>
+            <a:r>
+              <a:rPr lang="en-US" sz="2800" dirty="0" smtClean="0"/>
+              <a:t>Debugging </a:t>
+            </a:r>
+            <a:r>
+              <a:rPr lang="en-US" sz="2800" dirty="0" err="1" smtClean="0"/>
+              <a:t>microservices</a:t>
+            </a:r>
+            <a:r>
+              <a:rPr lang="en-US" sz="2800" dirty="0" smtClean="0"/>
+              <a:t> applications turns out to be a challenging task due to </a:t>
+            </a:r>
+          </a:p>
+          <a:p>
+            <a:pPr lvl="1"/>
+            <a:r>
+              <a:rPr lang="en-US" sz="2400" dirty="0" smtClean="0"/>
+              <a:t>the </a:t>
+            </a:r>
+            <a:r>
+              <a:rPr lang="en-US" sz="2400" i="1" dirty="0" smtClean="0">
+                <a:solidFill>
+                  <a:srgbClr val="C00000"/>
+                </a:solidFill>
+              </a:rPr>
+              <a:t>complexity of service dependencies</a:t>
+            </a:r>
+            <a:r>
+              <a:rPr lang="en-US" sz="2400" dirty="0" smtClean="0"/>
+              <a:t> and </a:t>
+            </a:r>
+          </a:p>
+          <a:p>
+            <a:pPr lvl="1"/>
+            <a:r>
+              <a:rPr lang="en-US" sz="2400" dirty="0" smtClean="0"/>
+              <a:t>the fact that any service can become </a:t>
+            </a:r>
+            <a:r>
+              <a:rPr lang="en-US" sz="2400" i="1" dirty="0" smtClean="0">
+                <a:solidFill>
+                  <a:srgbClr val="C00000"/>
+                </a:solidFill>
+              </a:rPr>
+              <a:t>temporarily inaccessible</a:t>
+            </a:r>
+            <a:r>
+              <a:rPr lang="en-US" sz="2400" dirty="0" smtClean="0"/>
+              <a:t> to its consumers</a:t>
+            </a:r>
+          </a:p>
+          <a:p>
+            <a:pPr lvl="1"/>
+            <a:r>
+              <a:rPr lang="en-US" sz="2400" dirty="0" smtClean="0"/>
+              <a:t>as the </a:t>
+            </a:r>
+            <a:r>
+              <a:rPr lang="en-US" sz="2400" u="sng" dirty="0" smtClean="0"/>
+              <a:t>application behavior</a:t>
+            </a:r>
+            <a:r>
+              <a:rPr lang="en-US" sz="2400" dirty="0" smtClean="0"/>
+              <a:t> depends on the flow of the traffic among </a:t>
+            </a:r>
+            <a:r>
+              <a:rPr lang="en-US" sz="2400" dirty="0" err="1" smtClean="0"/>
+              <a:t>microservices</a:t>
+            </a:r>
+            <a:r>
+              <a:rPr lang="en-US" sz="2400" dirty="0" smtClean="0"/>
+              <a:t>, </a:t>
+            </a:r>
+            <a:r>
+              <a:rPr lang="en-US" sz="2400" i="1" dirty="0" smtClean="0">
+                <a:solidFill>
+                  <a:srgbClr val="C00000"/>
+                </a:solidFill>
+              </a:rPr>
+              <a:t>traffic control</a:t>
+            </a:r>
+            <a:r>
+              <a:rPr lang="en-US" sz="2400" dirty="0" smtClean="0"/>
+              <a:t> becomes a must (but currently missing) for runtime operation.</a:t>
+            </a:r>
+            <a:endParaRPr lang="en-US" sz="2400" dirty="0"/>
+          </a:p>
+        </p:txBody>
+      </p:sp>
     </p:spTree>
   </p:cSld>
   <p:clrMapOvr>
@@ -4581,6 +4594,272 @@
           <a:bodyPr/>
           <a:lstStyle/>
           <a:p>
+            <a:pPr algn="l"/>
+            <a:r>
+              <a:rPr lang="en-US" dirty="0" smtClean="0"/>
+              <a:t>1. Install the </a:t>
+            </a:r>
+            <a:r>
+              <a:rPr lang="en-US" dirty="0" err="1" smtClean="0"/>
+              <a:t>linkerd</a:t>
+            </a:r>
+            <a:r>
+              <a:rPr lang="en-US" dirty="0" smtClean="0"/>
+              <a:t> CLI on </a:t>
+            </a:r>
+            <a:r>
+              <a:rPr lang="en-US" dirty="0" err="1" smtClean="0"/>
+              <a:t>macOS</a:t>
+            </a:r>
+            <a:endParaRPr lang="en-US" dirty="0"/>
+          </a:p>
+        </p:txBody>
+      </p:sp>
+      <p:sp>
+        <p:nvSpPr>
+          <p:cNvPr id="3" name="Content Placeholder 2"/>
+          <p:cNvSpPr>
+            <a:spLocks noGrp="1"/>
+          </p:cNvSpPr>
+          <p:nvPr>
+            <p:ph idx="1"/>
+          </p:nvPr>
+        </p:nvSpPr>
+        <p:spPr/>
+        <p:txBody>
+          <a:bodyPr/>
+          <a:lstStyle/>
+          <a:p>
+            <a:r>
+              <a:rPr lang="en-US" sz="2400" dirty="0" smtClean="0">
+                <a:hlinkClick r:id="rId2"/>
+              </a:rPr>
+              <a:t>https://linkerd.io/2.16/getting-started/</a:t>
+            </a:r>
+            <a:endParaRPr lang="en-US" sz="2400" dirty="0" smtClean="0"/>
+          </a:p>
+          <a:p>
+            <a:r>
+              <a:rPr lang="en-US" sz="2200" dirty="0" err="1" smtClean="0">
+                <a:latin typeface="Consolas" pitchFamily="49" charset="0"/>
+              </a:rPr>
+              <a:t>kubectl</a:t>
+            </a:r>
+            <a:r>
+              <a:rPr lang="en-US" sz="2200" dirty="0" smtClean="0">
+                <a:latin typeface="Consolas" pitchFamily="49" charset="0"/>
+              </a:rPr>
+              <a:t> version</a:t>
+            </a:r>
+          </a:p>
+          <a:p>
+            <a:r>
+              <a:rPr lang="en-US" sz="2200" dirty="0" smtClean="0">
+                <a:latin typeface="Consolas" pitchFamily="49" charset="0"/>
+              </a:rPr>
+              <a:t>curl --proto '=https' --tlsv1.2 -</a:t>
+            </a:r>
+            <a:r>
+              <a:rPr lang="en-US" sz="2200" dirty="0" err="1" smtClean="0">
+                <a:latin typeface="Consolas" pitchFamily="49" charset="0"/>
+              </a:rPr>
+              <a:t>sSfL</a:t>
+            </a:r>
+            <a:r>
+              <a:rPr lang="en-US" sz="2200" dirty="0" smtClean="0">
+                <a:latin typeface="Consolas" pitchFamily="49" charset="0"/>
+              </a:rPr>
+              <a:t> https://run.linkerd.io/install-edge | </a:t>
+            </a:r>
+            <a:r>
+              <a:rPr lang="en-US" sz="2200" dirty="0" err="1" smtClean="0">
+                <a:latin typeface="Consolas" pitchFamily="49" charset="0"/>
+              </a:rPr>
+              <a:t>sh</a:t>
+            </a:r>
+            <a:endParaRPr lang="en-US" sz="2200" dirty="0" smtClean="0">
+              <a:latin typeface="Consolas" pitchFamily="49" charset="0"/>
+            </a:endParaRPr>
+          </a:p>
+          <a:p>
+            <a:r>
+              <a:rPr lang="en-US" sz="2200" dirty="0" err="1" smtClean="0">
+                <a:latin typeface="Consolas" pitchFamily="49" charset="0"/>
+              </a:rPr>
+              <a:t>sudo</a:t>
+            </a:r>
+            <a:r>
+              <a:rPr lang="en-US" sz="2200" dirty="0" smtClean="0">
+                <a:latin typeface="Consolas" pitchFamily="49" charset="0"/>
+              </a:rPr>
+              <a:t> </a:t>
+            </a:r>
+            <a:r>
+              <a:rPr lang="en-US" sz="2200" dirty="0" err="1" smtClean="0">
+                <a:latin typeface="Consolas" pitchFamily="49" charset="0"/>
+              </a:rPr>
+              <a:t>nano</a:t>
+            </a:r>
+            <a:r>
+              <a:rPr lang="en-US" sz="2200" dirty="0" smtClean="0">
+                <a:latin typeface="Consolas" pitchFamily="49" charset="0"/>
+              </a:rPr>
+              <a:t> /etc/paths</a:t>
+            </a:r>
+          </a:p>
+          <a:p>
+            <a:pPr lvl="1"/>
+            <a:r>
+              <a:rPr lang="en-US" sz="1800" dirty="0" smtClean="0">
+                <a:latin typeface="Consolas" pitchFamily="49" charset="0"/>
+              </a:rPr>
+              <a:t>$HOME/.linkerd2/bin</a:t>
+            </a:r>
+          </a:p>
+          <a:p>
+            <a:r>
+              <a:rPr lang="en-US" sz="2200" dirty="0" err="1" smtClean="0">
+                <a:latin typeface="Consolas" pitchFamily="49" charset="0"/>
+              </a:rPr>
+              <a:t>linkerd</a:t>
+            </a:r>
+            <a:r>
+              <a:rPr lang="en-US" sz="2200" dirty="0" smtClean="0">
+                <a:latin typeface="Consolas" pitchFamily="49" charset="0"/>
+              </a:rPr>
+              <a:t> version</a:t>
+            </a:r>
+          </a:p>
+          <a:p>
+            <a:endParaRPr lang="en-US" sz="2200" dirty="0" smtClean="0">
+              <a:latin typeface="Consolas" pitchFamily="49" charset="0"/>
+            </a:endParaRPr>
+          </a:p>
+        </p:txBody>
+      </p:sp>
+      <p:pic>
+        <p:nvPicPr>
+          <p:cNvPr id="1028" name="Picture 4"/>
+          <p:cNvPicPr>
+            <a:picLocks noChangeAspect="1" noChangeArrowheads="1"/>
+          </p:cNvPicPr>
+          <p:nvPr/>
+        </p:nvPicPr>
+        <p:blipFill>
+          <a:blip r:embed="rId3" cstate="print"/>
+          <a:srcRect/>
+          <a:stretch>
+            <a:fillRect/>
+          </a:stretch>
+        </p:blipFill>
+        <p:spPr bwMode="auto">
+          <a:xfrm>
+            <a:off x="2081212" y="4724400"/>
+            <a:ext cx="5081588" cy="1428750"/>
+          </a:xfrm>
+          <a:prstGeom prst="rect">
+            <a:avLst/>
+          </a:prstGeom>
+          <a:noFill/>
+          <a:ln w="9525">
+            <a:noFill/>
+            <a:miter lim="800000"/>
+            <a:headEnd/>
+            <a:tailEnd/>
+          </a:ln>
+        </p:spPr>
+      </p:pic>
+    </p:spTree>
+  </p:cSld>
+  <p:clrMapOvr>
+    <a:masterClrMapping/>
+  </p:clrMapOvr>
+</p:sld>
+</file>
+
+<file path=ppt/slides/slide17.xml><?xml version="1.0" encoding="utf-8"?>
+<p:sld xmlns:a="http://schemas.openxmlformats.org/drawingml/2006/main" xmlns:r="http://schemas.openxmlformats.org/officeDocument/2006/relationships" xmlns:p="http://schemas.openxmlformats.org/presentationml/2006/main">
+  <p:cSld>
+    <p:spTree>
+      <p:nvGrpSpPr>
+        <p:cNvPr id="1" name=""/>
+        <p:cNvGrpSpPr/>
+        <p:nvPr/>
+      </p:nvGrpSpPr>
+      <p:grpSpPr>
+        <a:xfrm>
+          <a:off x="0" y="0"/>
+          <a:ext cx="0" cy="0"/>
+          <a:chOff x="0" y="0"/>
+          <a:chExt cx="0" cy="0"/>
+        </a:xfrm>
+      </p:grpSpPr>
+      <p:pic>
+        <p:nvPicPr>
+          <p:cNvPr id="4" name="Picture 2" descr="https://lh3.ggpht.com/1IfZLL2QDSjZ0wS7sUhaMlsAOS8BBzdR3wZ1WawgRn7KZAM8nEVZYMOUM-lqQb0ikIzp=w300"/>
+          <p:cNvPicPr>
+            <a:picLocks noChangeAspect="1" noChangeArrowheads="1"/>
+          </p:cNvPicPr>
+          <p:nvPr/>
+        </p:nvPicPr>
+        <p:blipFill>
+          <a:blip r:embed="rId2" cstate="print"/>
+          <a:srcRect/>
+          <a:stretch>
+            <a:fillRect/>
+          </a:stretch>
+        </p:blipFill>
+        <p:spPr bwMode="auto">
+          <a:xfrm>
+            <a:off x="3276600" y="1905000"/>
+            <a:ext cx="2857500" cy="2857500"/>
+          </a:xfrm>
+          <a:prstGeom prst="rect">
+            <a:avLst/>
+          </a:prstGeom>
+          <a:noFill/>
+        </p:spPr>
+      </p:pic>
+    </p:spTree>
+  </p:cSld>
+  <p:clrMapOvr>
+    <a:masterClrMapping/>
+  </p:clrMapOvr>
+</p:sld>
+</file>
+
+<file path=ppt/slides/slide18.xml><?xml version="1.0" encoding="utf-8"?>
+<p:sld xmlns:a="http://schemas.openxmlformats.org/drawingml/2006/main" xmlns:r="http://schemas.openxmlformats.org/officeDocument/2006/relationships" xmlns:p="http://schemas.openxmlformats.org/presentationml/2006/main">
+  <p:cSld>
+    <p:spTree>
+      <p:nvGrpSpPr>
+        <p:cNvPr id="1" name=""/>
+        <p:cNvGrpSpPr/>
+        <p:nvPr/>
+      </p:nvGrpSpPr>
+      <p:grpSpPr>
+        <a:xfrm>
+          <a:off x="0" y="0"/>
+          <a:ext cx="0" cy="0"/>
+          <a:chOff x="0" y="0"/>
+          <a:chExt cx="0" cy="0"/>
+        </a:xfrm>
+      </p:grpSpPr>
+      <p:sp>
+        <p:nvSpPr>
+          <p:cNvPr id="2" name="Title 1"/>
+          <p:cNvSpPr>
+            <a:spLocks noGrp="1"/>
+          </p:cNvSpPr>
+          <p:nvPr>
+            <p:ph type="title"/>
+          </p:nvPr>
+        </p:nvSpPr>
+        <p:spPr/>
+        <p:txBody>
+          <a:bodyPr/>
+          <a:lstStyle/>
+          <a:p>
             <a:r>
               <a:rPr lang="en-US" dirty="0" smtClean="0"/>
               <a:t>Intro to </a:t>
@@ -4588,6 +4867,10 @@
             <a:r>
               <a:rPr lang="en-US" dirty="0" err="1" smtClean="0"/>
               <a:t>Linkerd</a:t>
+            </a:r>
+            <a:r>
+              <a:rPr lang="en-US" dirty="0" smtClean="0"/>
+              <a:t> [2]</a:t>
             </a:r>
             <a:endParaRPr lang="en-US" dirty="0"/>
           </a:p>
@@ -4633,7 +4916,7 @@
 </p:sld>
 </file>
 
-<file path=ppt/slides/slide17.xml><?xml version="1.0" encoding="utf-8"?>
+<file path=ppt/slides/slide19.xml><?xml version="1.0" encoding="utf-8"?>
 <p:sld xmlns:a="http://schemas.openxmlformats.org/drawingml/2006/main" xmlns:r="http://schemas.openxmlformats.org/officeDocument/2006/relationships" xmlns:p="http://schemas.openxmlformats.org/presentationml/2006/main">
   <p:cSld>
     <p:spTree>
@@ -4696,186 +4979,6 @@
           <a:xfrm>
             <a:off x="1524000" y="1981200"/>
             <a:ext cx="5924550" cy="4005263"/>
-          </a:xfrm>
-          <a:prstGeom prst="rect">
-            <a:avLst/>
-          </a:prstGeom>
-          <a:noFill/>
-          <a:ln w="9525">
-            <a:noFill/>
-            <a:miter lim="800000"/>
-            <a:headEnd/>
-            <a:tailEnd/>
-          </a:ln>
-        </p:spPr>
-      </p:pic>
-    </p:spTree>
-  </p:cSld>
-  <p:clrMapOvr>
-    <a:masterClrMapping/>
-  </p:clrMapOvr>
-</p:sld>
-</file>
-
-<file path=ppt/slides/slide18.xml><?xml version="1.0" encoding="utf-8"?>
-<p:sld xmlns:a="http://schemas.openxmlformats.org/drawingml/2006/main" xmlns:r="http://schemas.openxmlformats.org/officeDocument/2006/relationships" xmlns:p="http://schemas.openxmlformats.org/presentationml/2006/main">
-  <p:cSld>
-    <p:spTree>
-      <p:nvGrpSpPr>
-        <p:cNvPr id="1" name=""/>
-        <p:cNvGrpSpPr/>
-        <p:nvPr/>
-      </p:nvGrpSpPr>
-      <p:grpSpPr>
-        <a:xfrm>
-          <a:off x="0" y="0"/>
-          <a:ext cx="0" cy="0"/>
-          <a:chOff x="0" y="0"/>
-          <a:chExt cx="0" cy="0"/>
-        </a:xfrm>
-      </p:grpSpPr>
-      <p:sp>
-        <p:nvSpPr>
-          <p:cNvPr id="2" name="Title 1"/>
-          <p:cNvSpPr>
-            <a:spLocks noGrp="1"/>
-          </p:cNvSpPr>
-          <p:nvPr>
-            <p:ph type="title"/>
-          </p:nvPr>
-        </p:nvSpPr>
-        <p:spPr/>
-        <p:txBody>
-          <a:bodyPr/>
-          <a:lstStyle/>
-          <a:p>
-            <a:r>
-              <a:rPr lang="en-US" dirty="0" smtClean="0"/>
-              <a:t>The </a:t>
-            </a:r>
-            <a:r>
-              <a:rPr lang="en-US" dirty="0" err="1" smtClean="0"/>
-              <a:t>Linkerd</a:t>
-            </a:r>
-            <a:r>
-              <a:rPr lang="en-US" dirty="0" smtClean="0"/>
-              <a:t> Control Plane</a:t>
-            </a:r>
-            <a:endParaRPr lang="en-US" dirty="0"/>
-          </a:p>
-        </p:txBody>
-      </p:sp>
-      <p:pic>
-        <p:nvPicPr>
-          <p:cNvPr id="6146" name="Picture 2"/>
-          <p:cNvPicPr>
-            <a:picLocks noChangeAspect="1" noChangeArrowheads="1"/>
-          </p:cNvPicPr>
-          <p:nvPr/>
-        </p:nvPicPr>
-        <p:blipFill>
-          <a:blip r:embed="rId2" cstate="print"/>
-          <a:srcRect/>
-          <a:stretch>
-            <a:fillRect/>
-          </a:stretch>
-        </p:blipFill>
-        <p:spPr bwMode="auto">
-          <a:xfrm>
-            <a:off x="2667000" y="1600200"/>
-            <a:ext cx="3677603" cy="4664075"/>
-          </a:xfrm>
-          <a:prstGeom prst="rect">
-            <a:avLst/>
-          </a:prstGeom>
-          <a:noFill/>
-          <a:ln w="9525">
-            <a:noFill/>
-            <a:miter lim="800000"/>
-            <a:headEnd/>
-            <a:tailEnd/>
-          </a:ln>
-        </p:spPr>
-      </p:pic>
-    </p:spTree>
-  </p:cSld>
-  <p:clrMapOvr>
-    <a:masterClrMapping/>
-  </p:clrMapOvr>
-</p:sld>
-</file>
-
-<file path=ppt/slides/slide19.xml><?xml version="1.0" encoding="utf-8"?>
-<p:sld xmlns:a="http://schemas.openxmlformats.org/drawingml/2006/main" xmlns:r="http://schemas.openxmlformats.org/officeDocument/2006/relationships" xmlns:p="http://schemas.openxmlformats.org/presentationml/2006/main">
-  <p:cSld>
-    <p:spTree>
-      <p:nvGrpSpPr>
-        <p:cNvPr id="1" name=""/>
-        <p:cNvGrpSpPr/>
-        <p:nvPr/>
-      </p:nvGrpSpPr>
-      <p:grpSpPr>
-        <a:xfrm>
-          <a:off x="0" y="0"/>
-          <a:ext cx="0" cy="0"/>
-          <a:chOff x="0" y="0"/>
-          <a:chExt cx="0" cy="0"/>
-        </a:xfrm>
-      </p:grpSpPr>
-      <p:sp>
-        <p:nvSpPr>
-          <p:cNvPr id="2" name="Title 1"/>
-          <p:cNvSpPr>
-            <a:spLocks noGrp="1"/>
-          </p:cNvSpPr>
-          <p:nvPr>
-            <p:ph type="title"/>
-          </p:nvPr>
-        </p:nvSpPr>
-        <p:spPr/>
-        <p:txBody>
-          <a:bodyPr/>
-          <a:lstStyle/>
-          <a:p>
-            <a:r>
-              <a:rPr lang="en-US" dirty="0" err="1" smtClean="0"/>
-              <a:t>Linkerd</a:t>
-            </a:r>
-            <a:r>
-              <a:rPr lang="en-US" dirty="0" smtClean="0"/>
-              <a:t> </a:t>
-            </a:r>
-            <a:r>
-              <a:rPr lang="en-US" dirty="0" err="1" smtClean="0"/>
-              <a:t>Viz</a:t>
-            </a:r>
-            <a:r>
-              <a:rPr lang="en-US" dirty="0" smtClean="0"/>
-              <a:t> (Dashboard)</a:t>
-            </a:r>
-            <a:endParaRPr lang="en-US" dirty="0"/>
-          </a:p>
-        </p:txBody>
-      </p:sp>
-      <p:pic>
-        <p:nvPicPr>
-          <p:cNvPr id="7170" name="Picture 2"/>
-          <p:cNvPicPr>
-            <a:picLocks noChangeAspect="1" noChangeArrowheads="1"/>
-          </p:cNvPicPr>
-          <p:nvPr/>
-        </p:nvPicPr>
-        <p:blipFill>
-          <a:blip r:embed="rId2" cstate="print"/>
-          <a:srcRect/>
-          <a:stretch>
-            <a:fillRect/>
-          </a:stretch>
-        </p:blipFill>
-        <p:spPr bwMode="auto">
-          <a:xfrm>
-            <a:off x="1600200" y="1981200"/>
-            <a:ext cx="6072188" cy="3890963"/>
           </a:xfrm>
           <a:prstGeom prst="rect">
             <a:avLst/>
@@ -5048,6 +5151,186 @@
           <a:lstStyle/>
           <a:p>
             <a:r>
+              <a:rPr lang="en-US" dirty="0" smtClean="0"/>
+              <a:t>The </a:t>
+            </a:r>
+            <a:r>
+              <a:rPr lang="en-US" dirty="0" err="1" smtClean="0"/>
+              <a:t>Linkerd</a:t>
+            </a:r>
+            <a:r>
+              <a:rPr lang="en-US" dirty="0" smtClean="0"/>
+              <a:t> Control Plane</a:t>
+            </a:r>
+            <a:endParaRPr lang="en-US" dirty="0"/>
+          </a:p>
+        </p:txBody>
+      </p:sp>
+      <p:pic>
+        <p:nvPicPr>
+          <p:cNvPr id="6146" name="Picture 2"/>
+          <p:cNvPicPr>
+            <a:picLocks noChangeAspect="1" noChangeArrowheads="1"/>
+          </p:cNvPicPr>
+          <p:nvPr/>
+        </p:nvPicPr>
+        <p:blipFill>
+          <a:blip r:embed="rId2" cstate="print"/>
+          <a:srcRect/>
+          <a:stretch>
+            <a:fillRect/>
+          </a:stretch>
+        </p:blipFill>
+        <p:spPr bwMode="auto">
+          <a:xfrm>
+            <a:off x="2667000" y="1600200"/>
+            <a:ext cx="3677603" cy="4664075"/>
+          </a:xfrm>
+          <a:prstGeom prst="rect">
+            <a:avLst/>
+          </a:prstGeom>
+          <a:noFill/>
+          <a:ln w="9525">
+            <a:noFill/>
+            <a:miter lim="800000"/>
+            <a:headEnd/>
+            <a:tailEnd/>
+          </a:ln>
+        </p:spPr>
+      </p:pic>
+    </p:spTree>
+  </p:cSld>
+  <p:clrMapOvr>
+    <a:masterClrMapping/>
+  </p:clrMapOvr>
+</p:sld>
+</file>
+
+<file path=ppt/slides/slide21.xml><?xml version="1.0" encoding="utf-8"?>
+<p:sld xmlns:a="http://schemas.openxmlformats.org/drawingml/2006/main" xmlns:r="http://schemas.openxmlformats.org/officeDocument/2006/relationships" xmlns:p="http://schemas.openxmlformats.org/presentationml/2006/main">
+  <p:cSld>
+    <p:spTree>
+      <p:nvGrpSpPr>
+        <p:cNvPr id="1" name=""/>
+        <p:cNvGrpSpPr/>
+        <p:nvPr/>
+      </p:nvGrpSpPr>
+      <p:grpSpPr>
+        <a:xfrm>
+          <a:off x="0" y="0"/>
+          <a:ext cx="0" cy="0"/>
+          <a:chOff x="0" y="0"/>
+          <a:chExt cx="0" cy="0"/>
+        </a:xfrm>
+      </p:grpSpPr>
+      <p:sp>
+        <p:nvSpPr>
+          <p:cNvPr id="2" name="Title 1"/>
+          <p:cNvSpPr>
+            <a:spLocks noGrp="1"/>
+          </p:cNvSpPr>
+          <p:nvPr>
+            <p:ph type="title"/>
+          </p:nvPr>
+        </p:nvSpPr>
+        <p:spPr/>
+        <p:txBody>
+          <a:bodyPr/>
+          <a:lstStyle/>
+          <a:p>
+            <a:r>
+              <a:rPr lang="en-US" dirty="0" err="1" smtClean="0"/>
+              <a:t>Linkerd</a:t>
+            </a:r>
+            <a:r>
+              <a:rPr lang="en-US" dirty="0" smtClean="0"/>
+              <a:t> </a:t>
+            </a:r>
+            <a:r>
+              <a:rPr lang="en-US" dirty="0" err="1" smtClean="0"/>
+              <a:t>Viz</a:t>
+            </a:r>
+            <a:r>
+              <a:rPr lang="en-US" dirty="0" smtClean="0"/>
+              <a:t> (Dashboard)</a:t>
+            </a:r>
+            <a:endParaRPr lang="en-US" dirty="0"/>
+          </a:p>
+        </p:txBody>
+      </p:sp>
+      <p:pic>
+        <p:nvPicPr>
+          <p:cNvPr id="7170" name="Picture 2"/>
+          <p:cNvPicPr>
+            <a:picLocks noChangeAspect="1" noChangeArrowheads="1"/>
+          </p:cNvPicPr>
+          <p:nvPr/>
+        </p:nvPicPr>
+        <p:blipFill>
+          <a:blip r:embed="rId2" cstate="print"/>
+          <a:srcRect/>
+          <a:stretch>
+            <a:fillRect/>
+          </a:stretch>
+        </p:blipFill>
+        <p:spPr bwMode="auto">
+          <a:xfrm>
+            <a:off x="1600200" y="1981200"/>
+            <a:ext cx="6072188" cy="3890963"/>
+          </a:xfrm>
+          <a:prstGeom prst="rect">
+            <a:avLst/>
+          </a:prstGeom>
+          <a:noFill/>
+          <a:ln w="9525">
+            <a:noFill/>
+            <a:miter lim="800000"/>
+            <a:headEnd/>
+            <a:tailEnd/>
+          </a:ln>
+        </p:spPr>
+      </p:pic>
+    </p:spTree>
+  </p:cSld>
+  <p:clrMapOvr>
+    <a:masterClrMapping/>
+  </p:clrMapOvr>
+</p:sld>
+</file>
+
+<file path=ppt/slides/slide22.xml><?xml version="1.0" encoding="utf-8"?>
+<p:sld xmlns:a="http://schemas.openxmlformats.org/drawingml/2006/main" xmlns:r="http://schemas.openxmlformats.org/officeDocument/2006/relationships" xmlns:p="http://schemas.openxmlformats.org/presentationml/2006/main">
+  <p:cSld>
+    <p:spTree>
+      <p:nvGrpSpPr>
+        <p:cNvPr id="1" name=""/>
+        <p:cNvGrpSpPr/>
+        <p:nvPr/>
+      </p:nvGrpSpPr>
+      <p:grpSpPr>
+        <a:xfrm>
+          <a:off x="0" y="0"/>
+          <a:ext cx="0" cy="0"/>
+          <a:chOff x="0" y="0"/>
+          <a:chExt cx="0" cy="0"/>
+        </a:xfrm>
+      </p:grpSpPr>
+      <p:sp>
+        <p:nvSpPr>
+          <p:cNvPr id="2" name="Title 1"/>
+          <p:cNvSpPr>
+            <a:spLocks noGrp="1"/>
+          </p:cNvSpPr>
+          <p:nvPr>
+            <p:ph type="title"/>
+          </p:nvPr>
+        </p:nvSpPr>
+        <p:spPr/>
+        <p:txBody>
+          <a:bodyPr/>
+          <a:lstStyle/>
+          <a:p>
+            <a:r>
               <a:rPr lang="en-US" dirty="0" err="1" smtClean="0"/>
               <a:t>Linkerd</a:t>
             </a:r>
@@ -5107,7 +5390,7 @@
 </p:sld>
 </file>
 
-<file path=ppt/slides/slide21.xml><?xml version="1.0" encoding="utf-8"?>
+<file path=ppt/slides/slide23.xml><?xml version="1.0" encoding="utf-8"?>
 <p:sld xmlns:a="http://schemas.openxmlformats.org/drawingml/2006/main" xmlns:r="http://schemas.openxmlformats.org/officeDocument/2006/relationships" xmlns:p="http://schemas.openxmlformats.org/presentationml/2006/main">
   <p:cSld>
     <p:spTree>
@@ -5191,7 +5474,7 @@
 </p:sld>
 </file>
 
-<file path=ppt/slides/slide22.xml><?xml version="1.0" encoding="utf-8"?>
+<file path=ppt/slides/slide24.xml><?xml version="1.0" encoding="utf-8"?>
 <p:sld xmlns:a="http://schemas.openxmlformats.org/drawingml/2006/main" xmlns:r="http://schemas.openxmlformats.org/officeDocument/2006/relationships" xmlns:p="http://schemas.openxmlformats.org/presentationml/2006/main">
   <p:cSld>
     <p:spTree>
@@ -5242,7 +5525,7 @@
 </p:sld>
 </file>
 
-<file path=ppt/slides/slide23.xml><?xml version="1.0" encoding="utf-8"?>
+<file path=ppt/slides/slide25.xml><?xml version="1.0" encoding="utf-8"?>
 <p:sld xmlns:a="http://schemas.openxmlformats.org/drawingml/2006/main" xmlns:r="http://schemas.openxmlformats.org/officeDocument/2006/relationships" xmlns:p="http://schemas.openxmlformats.org/presentationml/2006/main">
   <p:cSld>
     <p:spTree>
@@ -5457,7 +5740,7 @@
 </p:sld>
 </file>
 
-<file path=ppt/slides/slide24.xml><?xml version="1.0" encoding="utf-8"?>
+<file path=ppt/slides/slide26.xml><?xml version="1.0" encoding="utf-8"?>
 <p:sld xmlns:a="http://schemas.openxmlformats.org/drawingml/2006/main" xmlns:r="http://schemas.openxmlformats.org/officeDocument/2006/relationships" xmlns:p="http://schemas.openxmlformats.org/presentationml/2006/main">
   <p:cSld>
     <p:spTree>
@@ -5607,7 +5890,7 @@
 </p:sld>
 </file>
 
-<file path=ppt/slides/slide25.xml><?xml version="1.0" encoding="utf-8"?>
+<file path=ppt/slides/slide27.xml><?xml version="1.0" encoding="utf-8"?>
 <p:sld xmlns:a="http://schemas.openxmlformats.org/drawingml/2006/main" xmlns:r="http://schemas.openxmlformats.org/officeDocument/2006/relationships" xmlns:p="http://schemas.openxmlformats.org/presentationml/2006/main">
   <p:cSld>
     <p:spTree>
@@ -5830,7 +6113,7 @@
 </p:sld>
 </file>
 
-<file path=ppt/slides/slide26.xml><?xml version="1.0" encoding="utf-8"?>
+<file path=ppt/slides/slide28.xml><?xml version="1.0" encoding="utf-8"?>
 <p:sld xmlns:a="http://schemas.openxmlformats.org/drawingml/2006/main" xmlns:r="http://schemas.openxmlformats.org/officeDocument/2006/relationships" xmlns:p="http://schemas.openxmlformats.org/presentationml/2006/main">
   <p:cSld>
     <p:spTree>
@@ -5996,7 +6279,7 @@
 </p:sld>
 </file>
 
-<file path=ppt/slides/slide27.xml><?xml version="1.0" encoding="utf-8"?>
+<file path=ppt/slides/slide29.xml><?xml version="1.0" encoding="utf-8"?>
 <p:sld xmlns:a="http://schemas.openxmlformats.org/drawingml/2006/main" xmlns:r="http://schemas.openxmlformats.org/officeDocument/2006/relationships" xmlns:p="http://schemas.openxmlformats.org/presentationml/2006/main">
   <p:cSld>
     <p:spTree>
@@ -6128,328 +6411,6 @@
           </a:ln>
         </p:spPr>
       </p:pic>
-    </p:spTree>
-  </p:cSld>
-  <p:clrMapOvr>
-    <a:masterClrMapping/>
-  </p:clrMapOvr>
-</p:sld>
-</file>
-
-<file path=ppt/slides/slide28.xml><?xml version="1.0" encoding="utf-8"?>
-<p:sld xmlns:a="http://schemas.openxmlformats.org/drawingml/2006/main" xmlns:r="http://schemas.openxmlformats.org/officeDocument/2006/relationships" xmlns:p="http://schemas.openxmlformats.org/presentationml/2006/main">
-  <p:cSld>
-    <p:spTree>
-      <p:nvGrpSpPr>
-        <p:cNvPr id="1" name=""/>
-        <p:cNvGrpSpPr/>
-        <p:nvPr/>
-      </p:nvGrpSpPr>
-      <p:grpSpPr>
-        <a:xfrm>
-          <a:off x="0" y="0"/>
-          <a:ext cx="0" cy="0"/>
-          <a:chOff x="0" y="0"/>
-          <a:chExt cx="0" cy="0"/>
-        </a:xfrm>
-      </p:grpSpPr>
-      <p:sp>
-        <p:nvSpPr>
-          <p:cNvPr id="2" name="Title 1"/>
-          <p:cNvSpPr>
-            <a:spLocks noGrp="1"/>
-          </p:cNvSpPr>
-          <p:nvPr>
-            <p:ph type="title"/>
-          </p:nvPr>
-        </p:nvSpPr>
-        <p:spPr/>
-        <p:txBody>
-          <a:bodyPr/>
-          <a:lstStyle/>
-          <a:p>
-            <a:pPr algn="l"/>
-            <a:r>
-              <a:rPr lang="en-US" dirty="0" smtClean="0"/>
-              <a:t>6. Uninstall </a:t>
-            </a:r>
-            <a:r>
-              <a:rPr lang="en-US" dirty="0" err="1" smtClean="0"/>
-              <a:t>Linkerd</a:t>
-            </a:r>
-            <a:endParaRPr lang="en-US" dirty="0"/>
-          </a:p>
-        </p:txBody>
-      </p:sp>
-      <p:sp>
-        <p:nvSpPr>
-          <p:cNvPr id="3" name="Content Placeholder 2"/>
-          <p:cNvSpPr>
-            <a:spLocks noGrp="1"/>
-          </p:cNvSpPr>
-          <p:nvPr>
-            <p:ph idx="1"/>
-          </p:nvPr>
-        </p:nvSpPr>
-        <p:spPr/>
-        <p:txBody>
-          <a:bodyPr/>
-          <a:lstStyle/>
-          <a:p>
-            <a:r>
-              <a:rPr lang="en-US" sz="2200" dirty="0" smtClean="0">
-                <a:latin typeface="Consolas" pitchFamily="49" charset="0"/>
-                <a:hlinkClick r:id="rId2"/>
-              </a:rPr>
-              <a:t>https://linkerd.io/2-edge/tasks/uninstall/</a:t>
-            </a:r>
-            <a:endParaRPr lang="en-US" sz="2200" dirty="0" smtClean="0">
-              <a:latin typeface="Consolas" pitchFamily="49" charset="0"/>
-            </a:endParaRPr>
-          </a:p>
-          <a:p>
-            <a:r>
-              <a:rPr lang="en-US" sz="2200" dirty="0" err="1" smtClean="0">
-                <a:latin typeface="Consolas" pitchFamily="49" charset="0"/>
-              </a:rPr>
-              <a:t>linkerd</a:t>
-            </a:r>
-            <a:r>
-              <a:rPr lang="en-US" sz="2200" dirty="0" smtClean="0">
-                <a:latin typeface="Consolas" pitchFamily="49" charset="0"/>
-              </a:rPr>
-              <a:t> </a:t>
-            </a:r>
-            <a:r>
-              <a:rPr lang="en-US" sz="2200" dirty="0" err="1" smtClean="0">
-                <a:latin typeface="Consolas" pitchFamily="49" charset="0"/>
-              </a:rPr>
-              <a:t>viz</a:t>
-            </a:r>
-            <a:r>
-              <a:rPr lang="en-US" sz="2200" dirty="0" smtClean="0">
-                <a:latin typeface="Consolas" pitchFamily="49" charset="0"/>
-              </a:rPr>
-              <a:t> uninstall | </a:t>
-            </a:r>
-            <a:r>
-              <a:rPr lang="en-US" sz="2200" dirty="0" err="1" smtClean="0">
-                <a:latin typeface="Consolas" pitchFamily="49" charset="0"/>
-              </a:rPr>
-              <a:t>kubectl</a:t>
-            </a:r>
-            <a:r>
-              <a:rPr lang="en-US" sz="2200" dirty="0" smtClean="0">
-                <a:latin typeface="Consolas" pitchFamily="49" charset="0"/>
-              </a:rPr>
-              <a:t> delete -f -</a:t>
-            </a:r>
-          </a:p>
-          <a:p>
-            <a:r>
-              <a:rPr lang="en-US" sz="2200" dirty="0" err="1" smtClean="0">
-                <a:latin typeface="Consolas" pitchFamily="49" charset="0"/>
-              </a:rPr>
-              <a:t>linkerd</a:t>
-            </a:r>
-            <a:r>
-              <a:rPr lang="en-US" sz="2200" dirty="0" smtClean="0">
-                <a:latin typeface="Consolas" pitchFamily="49" charset="0"/>
-              </a:rPr>
-              <a:t> uninstall | </a:t>
-            </a:r>
-            <a:r>
-              <a:rPr lang="en-US" sz="2200" dirty="0" err="1" smtClean="0">
-                <a:latin typeface="Consolas" pitchFamily="49" charset="0"/>
-              </a:rPr>
-              <a:t>kubectl</a:t>
-            </a:r>
-            <a:r>
-              <a:rPr lang="en-US" sz="2200" dirty="0" smtClean="0">
-                <a:latin typeface="Consolas" pitchFamily="49" charset="0"/>
-              </a:rPr>
-              <a:t> delete -f -</a:t>
-            </a:r>
-          </a:p>
-          <a:p>
-            <a:r>
-              <a:rPr lang="en-US" sz="2200" dirty="0" smtClean="0">
-                <a:latin typeface="Consolas" pitchFamily="49" charset="0"/>
-              </a:rPr>
-              <a:t>#  delete cluster.</a:t>
-            </a:r>
-          </a:p>
-          <a:p>
-            <a:r>
-              <a:rPr lang="en-US" sz="2200" dirty="0" smtClean="0">
-                <a:latin typeface="Consolas" pitchFamily="49" charset="0"/>
-              </a:rPr>
-              <a:t>k3d cluster delete </a:t>
-            </a:r>
-            <a:r>
-              <a:rPr lang="en-US" sz="2200" dirty="0" err="1" smtClean="0">
-                <a:latin typeface="Consolas" pitchFamily="49" charset="0"/>
-              </a:rPr>
-              <a:t>linkerd</a:t>
-            </a:r>
-            <a:endParaRPr lang="en-US" sz="2200" dirty="0" smtClean="0">
-              <a:latin typeface="Consolas" pitchFamily="49" charset="0"/>
-            </a:endParaRPr>
-          </a:p>
-          <a:p>
-            <a:endParaRPr lang="en-US" sz="2200" dirty="0" smtClean="0">
-              <a:latin typeface="Consolas" pitchFamily="49" charset="0"/>
-            </a:endParaRPr>
-          </a:p>
-        </p:txBody>
-      </p:sp>
-    </p:spTree>
-  </p:cSld>
-  <p:clrMapOvr>
-    <a:masterClrMapping/>
-  </p:clrMapOvr>
-</p:sld>
-</file>
-
-<file path=ppt/slides/slide29.xml><?xml version="1.0" encoding="utf-8"?>
-<p:sld xmlns:a="http://schemas.openxmlformats.org/drawingml/2006/main" xmlns:r="http://schemas.openxmlformats.org/officeDocument/2006/relationships" xmlns:p="http://schemas.openxmlformats.org/presentationml/2006/main">
-  <p:cSld>
-    <p:spTree>
-      <p:nvGrpSpPr>
-        <p:cNvPr id="1" name=""/>
-        <p:cNvGrpSpPr/>
-        <p:nvPr/>
-      </p:nvGrpSpPr>
-      <p:grpSpPr>
-        <a:xfrm>
-          <a:off x="0" y="0"/>
-          <a:ext cx="0" cy="0"/>
-          <a:chOff x="0" y="0"/>
-          <a:chExt cx="0" cy="0"/>
-        </a:xfrm>
-      </p:grpSpPr>
-      <p:sp>
-        <p:nvSpPr>
-          <p:cNvPr id="2" name="Title 1"/>
-          <p:cNvSpPr>
-            <a:spLocks noGrp="1"/>
-          </p:cNvSpPr>
-          <p:nvPr>
-            <p:ph type="title"/>
-          </p:nvPr>
-        </p:nvSpPr>
-        <p:spPr/>
-        <p:txBody>
-          <a:bodyPr/>
-          <a:lstStyle/>
-          <a:p>
-            <a:r>
-              <a:rPr lang="en-US" dirty="0" smtClean="0"/>
-              <a:t>Opaque and Skip Ports</a:t>
-            </a:r>
-            <a:endParaRPr lang="en-US" dirty="0"/>
-          </a:p>
-        </p:txBody>
-      </p:sp>
-      <p:sp>
-        <p:nvSpPr>
-          <p:cNvPr id="3" name="Content Placeholder 2"/>
-          <p:cNvSpPr>
-            <a:spLocks noGrp="1"/>
-          </p:cNvSpPr>
-          <p:nvPr>
-            <p:ph idx="1"/>
-          </p:nvPr>
-        </p:nvSpPr>
-        <p:spPr/>
-        <p:txBody>
-          <a:bodyPr/>
-          <a:lstStyle/>
-          <a:p>
-            <a:r>
-              <a:rPr lang="en-US" sz="2400" dirty="0" smtClean="0"/>
-              <a:t>Opaque ports and skip ports are </a:t>
-            </a:r>
-            <a:r>
-              <a:rPr lang="en-US" sz="2400" dirty="0" err="1" smtClean="0"/>
-              <a:t>Linkerd</a:t>
-            </a:r>
-            <a:r>
-              <a:rPr lang="en-US" sz="2400" dirty="0" smtClean="0"/>
-              <a:t> names for ports to which special rules are applied.</a:t>
-            </a:r>
-          </a:p>
-          <a:p>
-            <a:r>
-              <a:rPr lang="en-US" sz="2400" dirty="0" smtClean="0"/>
-              <a:t>An </a:t>
-            </a:r>
-            <a:r>
-              <a:rPr lang="en-US" sz="2400" i="1" dirty="0" smtClean="0">
-                <a:solidFill>
-                  <a:srgbClr val="C00000"/>
-                </a:solidFill>
-              </a:rPr>
-              <a:t>opaque port</a:t>
-            </a:r>
-            <a:r>
-              <a:rPr lang="en-US" sz="2400" dirty="0" smtClean="0"/>
-              <a:t> in </a:t>
-            </a:r>
-            <a:r>
-              <a:rPr lang="en-US" sz="2400" dirty="0" err="1" smtClean="0"/>
-              <a:t>Linkerd</a:t>
-            </a:r>
-            <a:r>
-              <a:rPr lang="en-US" sz="2400" dirty="0" smtClean="0"/>
-              <a:t> is a port that should be treated as a generic TCP connection. </a:t>
-            </a:r>
-            <a:r>
-              <a:rPr lang="en-US" sz="2400" dirty="0" err="1" smtClean="0"/>
-              <a:t>Linkerd</a:t>
-            </a:r>
-            <a:r>
-              <a:rPr lang="en-US" sz="2400" dirty="0" smtClean="0"/>
-              <a:t> will still use </a:t>
-            </a:r>
-            <a:r>
-              <a:rPr lang="en-US" sz="2400" dirty="0" err="1" smtClean="0"/>
-              <a:t>mTLS</a:t>
-            </a:r>
-            <a:r>
-              <a:rPr lang="en-US" sz="2400" dirty="0" smtClean="0"/>
-              <a:t> on opaque traffic.</a:t>
-            </a:r>
-          </a:p>
-          <a:p>
-            <a:r>
-              <a:rPr lang="en-US" sz="2400" dirty="0" smtClean="0"/>
-              <a:t>A </a:t>
-            </a:r>
-            <a:r>
-              <a:rPr lang="en-US" sz="2400" i="1" dirty="0" smtClean="0">
-                <a:solidFill>
-                  <a:srgbClr val="C00000"/>
-                </a:solidFill>
-              </a:rPr>
-              <a:t>skip port</a:t>
-            </a:r>
-            <a:r>
-              <a:rPr lang="en-US" sz="2400" dirty="0" smtClean="0"/>
-              <a:t> is one that you instruct </a:t>
-            </a:r>
-            <a:r>
-              <a:rPr lang="en-US" sz="2400" dirty="0" err="1" smtClean="0"/>
-              <a:t>Linkerd</a:t>
-            </a:r>
-            <a:r>
-              <a:rPr lang="en-US" sz="2400" dirty="0" smtClean="0"/>
-              <a:t> to completely ignore.</a:t>
-            </a:r>
-            <a:endParaRPr lang="en-US" sz="2400" dirty="0"/>
-          </a:p>
-        </p:txBody>
-      </p:sp>
     </p:spTree>
   </p:cSld>
   <p:clrMapOvr>
@@ -6612,6 +6573,328 @@
           <a:bodyPr/>
           <a:lstStyle/>
           <a:p>
+            <a:pPr algn="l"/>
+            <a:r>
+              <a:rPr lang="en-US" dirty="0" smtClean="0"/>
+              <a:t>6. Uninstall </a:t>
+            </a:r>
+            <a:r>
+              <a:rPr lang="en-US" dirty="0" err="1" smtClean="0"/>
+              <a:t>Linkerd</a:t>
+            </a:r>
+            <a:endParaRPr lang="en-US" dirty="0"/>
+          </a:p>
+        </p:txBody>
+      </p:sp>
+      <p:sp>
+        <p:nvSpPr>
+          <p:cNvPr id="3" name="Content Placeholder 2"/>
+          <p:cNvSpPr>
+            <a:spLocks noGrp="1"/>
+          </p:cNvSpPr>
+          <p:nvPr>
+            <p:ph idx="1"/>
+          </p:nvPr>
+        </p:nvSpPr>
+        <p:spPr/>
+        <p:txBody>
+          <a:bodyPr/>
+          <a:lstStyle/>
+          <a:p>
+            <a:r>
+              <a:rPr lang="en-US" sz="2200" dirty="0" smtClean="0">
+                <a:latin typeface="Consolas" pitchFamily="49" charset="0"/>
+                <a:hlinkClick r:id="rId2"/>
+              </a:rPr>
+              <a:t>https://linkerd.io/2-edge/tasks/uninstall/</a:t>
+            </a:r>
+            <a:endParaRPr lang="en-US" sz="2200" dirty="0" smtClean="0">
+              <a:latin typeface="Consolas" pitchFamily="49" charset="0"/>
+            </a:endParaRPr>
+          </a:p>
+          <a:p>
+            <a:r>
+              <a:rPr lang="en-US" sz="2200" dirty="0" err="1" smtClean="0">
+                <a:latin typeface="Consolas" pitchFamily="49" charset="0"/>
+              </a:rPr>
+              <a:t>linkerd</a:t>
+            </a:r>
+            <a:r>
+              <a:rPr lang="en-US" sz="2200" dirty="0" smtClean="0">
+                <a:latin typeface="Consolas" pitchFamily="49" charset="0"/>
+              </a:rPr>
+              <a:t> </a:t>
+            </a:r>
+            <a:r>
+              <a:rPr lang="en-US" sz="2200" dirty="0" err="1" smtClean="0">
+                <a:latin typeface="Consolas" pitchFamily="49" charset="0"/>
+              </a:rPr>
+              <a:t>viz</a:t>
+            </a:r>
+            <a:r>
+              <a:rPr lang="en-US" sz="2200" dirty="0" smtClean="0">
+                <a:latin typeface="Consolas" pitchFamily="49" charset="0"/>
+              </a:rPr>
+              <a:t> uninstall | </a:t>
+            </a:r>
+            <a:r>
+              <a:rPr lang="en-US" sz="2200" dirty="0" err="1" smtClean="0">
+                <a:latin typeface="Consolas" pitchFamily="49" charset="0"/>
+              </a:rPr>
+              <a:t>kubectl</a:t>
+            </a:r>
+            <a:r>
+              <a:rPr lang="en-US" sz="2200" dirty="0" smtClean="0">
+                <a:latin typeface="Consolas" pitchFamily="49" charset="0"/>
+              </a:rPr>
+              <a:t> delete -f -</a:t>
+            </a:r>
+          </a:p>
+          <a:p>
+            <a:r>
+              <a:rPr lang="en-US" sz="2200" dirty="0" err="1" smtClean="0">
+                <a:latin typeface="Consolas" pitchFamily="49" charset="0"/>
+              </a:rPr>
+              <a:t>linkerd</a:t>
+            </a:r>
+            <a:r>
+              <a:rPr lang="en-US" sz="2200" dirty="0" smtClean="0">
+                <a:latin typeface="Consolas" pitchFamily="49" charset="0"/>
+              </a:rPr>
+              <a:t> uninstall | </a:t>
+            </a:r>
+            <a:r>
+              <a:rPr lang="en-US" sz="2200" dirty="0" err="1" smtClean="0">
+                <a:latin typeface="Consolas" pitchFamily="49" charset="0"/>
+              </a:rPr>
+              <a:t>kubectl</a:t>
+            </a:r>
+            <a:r>
+              <a:rPr lang="en-US" sz="2200" dirty="0" smtClean="0">
+                <a:latin typeface="Consolas" pitchFamily="49" charset="0"/>
+              </a:rPr>
+              <a:t> delete -f -</a:t>
+            </a:r>
+          </a:p>
+          <a:p>
+            <a:r>
+              <a:rPr lang="en-US" sz="2200" dirty="0" smtClean="0">
+                <a:latin typeface="Consolas" pitchFamily="49" charset="0"/>
+              </a:rPr>
+              <a:t>#  delete cluster.</a:t>
+            </a:r>
+          </a:p>
+          <a:p>
+            <a:r>
+              <a:rPr lang="en-US" sz="2200" dirty="0" smtClean="0">
+                <a:latin typeface="Consolas" pitchFamily="49" charset="0"/>
+              </a:rPr>
+              <a:t>k3d cluster delete </a:t>
+            </a:r>
+            <a:r>
+              <a:rPr lang="en-US" sz="2200" dirty="0" err="1" smtClean="0">
+                <a:latin typeface="Consolas" pitchFamily="49" charset="0"/>
+              </a:rPr>
+              <a:t>linkerd</a:t>
+            </a:r>
+            <a:endParaRPr lang="en-US" sz="2200" dirty="0" smtClean="0">
+              <a:latin typeface="Consolas" pitchFamily="49" charset="0"/>
+            </a:endParaRPr>
+          </a:p>
+          <a:p>
+            <a:endParaRPr lang="en-US" sz="2200" dirty="0" smtClean="0">
+              <a:latin typeface="Consolas" pitchFamily="49" charset="0"/>
+            </a:endParaRPr>
+          </a:p>
+        </p:txBody>
+      </p:sp>
+    </p:spTree>
+  </p:cSld>
+  <p:clrMapOvr>
+    <a:masterClrMapping/>
+  </p:clrMapOvr>
+</p:sld>
+</file>
+
+<file path=ppt/slides/slide31.xml><?xml version="1.0" encoding="utf-8"?>
+<p:sld xmlns:a="http://schemas.openxmlformats.org/drawingml/2006/main" xmlns:r="http://schemas.openxmlformats.org/officeDocument/2006/relationships" xmlns:p="http://schemas.openxmlformats.org/presentationml/2006/main">
+  <p:cSld>
+    <p:spTree>
+      <p:nvGrpSpPr>
+        <p:cNvPr id="1" name=""/>
+        <p:cNvGrpSpPr/>
+        <p:nvPr/>
+      </p:nvGrpSpPr>
+      <p:grpSpPr>
+        <a:xfrm>
+          <a:off x="0" y="0"/>
+          <a:ext cx="0" cy="0"/>
+          <a:chOff x="0" y="0"/>
+          <a:chExt cx="0" cy="0"/>
+        </a:xfrm>
+      </p:grpSpPr>
+      <p:sp>
+        <p:nvSpPr>
+          <p:cNvPr id="2" name="Title 1"/>
+          <p:cNvSpPr>
+            <a:spLocks noGrp="1"/>
+          </p:cNvSpPr>
+          <p:nvPr>
+            <p:ph type="title"/>
+          </p:nvPr>
+        </p:nvSpPr>
+        <p:spPr/>
+        <p:txBody>
+          <a:bodyPr/>
+          <a:lstStyle/>
+          <a:p>
+            <a:r>
+              <a:rPr lang="en-US" dirty="0" smtClean="0"/>
+              <a:t>Opaque and Skip Ports</a:t>
+            </a:r>
+            <a:endParaRPr lang="en-US" dirty="0"/>
+          </a:p>
+        </p:txBody>
+      </p:sp>
+      <p:sp>
+        <p:nvSpPr>
+          <p:cNvPr id="3" name="Content Placeholder 2"/>
+          <p:cNvSpPr>
+            <a:spLocks noGrp="1"/>
+          </p:cNvSpPr>
+          <p:nvPr>
+            <p:ph idx="1"/>
+          </p:nvPr>
+        </p:nvSpPr>
+        <p:spPr/>
+        <p:txBody>
+          <a:bodyPr/>
+          <a:lstStyle/>
+          <a:p>
+            <a:r>
+              <a:rPr lang="en-US" sz="2400" dirty="0" smtClean="0"/>
+              <a:t>Opaque ports and skip ports are </a:t>
+            </a:r>
+            <a:r>
+              <a:rPr lang="en-US" sz="2400" dirty="0" err="1" smtClean="0"/>
+              <a:t>Linkerd</a:t>
+            </a:r>
+            <a:r>
+              <a:rPr lang="en-US" sz="2400" dirty="0" smtClean="0"/>
+              <a:t> names for ports to which special rules are applied.</a:t>
+            </a:r>
+          </a:p>
+          <a:p>
+            <a:r>
+              <a:rPr lang="en-US" sz="2400" dirty="0" smtClean="0"/>
+              <a:t>An </a:t>
+            </a:r>
+            <a:r>
+              <a:rPr lang="en-US" sz="2400" i="1" dirty="0" smtClean="0">
+                <a:solidFill>
+                  <a:srgbClr val="C00000"/>
+                </a:solidFill>
+              </a:rPr>
+              <a:t>opaque port</a:t>
+            </a:r>
+            <a:r>
+              <a:rPr lang="en-US" sz="2400" dirty="0" smtClean="0"/>
+              <a:t> in </a:t>
+            </a:r>
+            <a:r>
+              <a:rPr lang="en-US" sz="2400" dirty="0" err="1" smtClean="0"/>
+              <a:t>Linkerd</a:t>
+            </a:r>
+            <a:r>
+              <a:rPr lang="en-US" sz="2400" dirty="0" smtClean="0"/>
+              <a:t> is a port that should be treated as a generic TCP connection. </a:t>
+            </a:r>
+            <a:r>
+              <a:rPr lang="en-US" sz="2400" dirty="0" err="1" smtClean="0"/>
+              <a:t>Linkerd</a:t>
+            </a:r>
+            <a:r>
+              <a:rPr lang="en-US" sz="2400" dirty="0" smtClean="0"/>
+              <a:t> will still use </a:t>
+            </a:r>
+            <a:r>
+              <a:rPr lang="en-US" sz="2400" dirty="0" err="1" smtClean="0"/>
+              <a:t>mTLS</a:t>
+            </a:r>
+            <a:r>
+              <a:rPr lang="en-US" sz="2400" dirty="0" smtClean="0"/>
+              <a:t> on opaque traffic.</a:t>
+            </a:r>
+          </a:p>
+          <a:p>
+            <a:r>
+              <a:rPr lang="en-US" sz="2400" dirty="0" smtClean="0"/>
+              <a:t>A </a:t>
+            </a:r>
+            <a:r>
+              <a:rPr lang="en-US" sz="2400" i="1" dirty="0" smtClean="0">
+                <a:solidFill>
+                  <a:srgbClr val="C00000"/>
+                </a:solidFill>
+              </a:rPr>
+              <a:t>skip port</a:t>
+            </a:r>
+            <a:r>
+              <a:rPr lang="en-US" sz="2400" dirty="0" smtClean="0"/>
+              <a:t> is one that you instruct </a:t>
+            </a:r>
+            <a:r>
+              <a:rPr lang="en-US" sz="2400" dirty="0" err="1" smtClean="0"/>
+              <a:t>Linkerd</a:t>
+            </a:r>
+            <a:r>
+              <a:rPr lang="en-US" sz="2400" dirty="0" smtClean="0"/>
+              <a:t> to completely ignore.</a:t>
+            </a:r>
+            <a:endParaRPr lang="en-US" sz="2400" dirty="0"/>
+          </a:p>
+        </p:txBody>
+      </p:sp>
+    </p:spTree>
+  </p:cSld>
+  <p:clrMapOvr>
+    <a:masterClrMapping/>
+  </p:clrMapOvr>
+</p:sld>
+</file>
+
+<file path=ppt/slides/slide32.xml><?xml version="1.0" encoding="utf-8"?>
+<p:sld xmlns:a="http://schemas.openxmlformats.org/drawingml/2006/main" xmlns:r="http://schemas.openxmlformats.org/officeDocument/2006/relationships" xmlns:p="http://schemas.openxmlformats.org/presentationml/2006/main">
+  <p:cSld>
+    <p:spTree>
+      <p:nvGrpSpPr>
+        <p:cNvPr id="1" name=""/>
+        <p:cNvGrpSpPr/>
+        <p:nvPr/>
+      </p:nvGrpSpPr>
+      <p:grpSpPr>
+        <a:xfrm>
+          <a:off x="0" y="0"/>
+          <a:ext cx="0" cy="0"/>
+          <a:chOff x="0" y="0"/>
+          <a:chExt cx="0" cy="0"/>
+        </a:xfrm>
+      </p:grpSpPr>
+      <p:sp>
+        <p:nvSpPr>
+          <p:cNvPr id="2" name="Title 1"/>
+          <p:cNvSpPr>
+            <a:spLocks noGrp="1"/>
+          </p:cNvSpPr>
+          <p:nvPr>
+            <p:ph type="title"/>
+          </p:nvPr>
+        </p:nvSpPr>
+        <p:spPr/>
+        <p:txBody>
+          <a:bodyPr/>
+          <a:lstStyle/>
+          <a:p>
             <a:r>
               <a:rPr lang="en-US" dirty="0" smtClean="0"/>
               <a:t>Mutual TLS</a:t>
@@ -6709,7 +6992,7 @@
 </p:sld>
 </file>
 
-<file path=ppt/slides/slide31.xml><?xml version="1.0" encoding="utf-8"?>
+<file path=ppt/slides/slide33.xml><?xml version="1.0" encoding="utf-8"?>
 <p:sld xmlns:a="http://schemas.openxmlformats.org/drawingml/2006/main" xmlns:r="http://schemas.openxmlformats.org/officeDocument/2006/relationships" xmlns:p="http://schemas.openxmlformats.org/presentationml/2006/main">
   <p:cSld>
     <p:spTree>
@@ -6760,7 +7043,7 @@
 </p:sld>
 </file>
 
-<file path=ppt/slides/slide32.xml><?xml version="1.0" encoding="utf-8"?>
+<file path=ppt/slides/slide34.xml><?xml version="1.0" encoding="utf-8"?>
 <p:sld xmlns:a="http://schemas.openxmlformats.org/drawingml/2006/main" xmlns:r="http://schemas.openxmlformats.org/officeDocument/2006/relationships" xmlns:p="http://schemas.openxmlformats.org/presentationml/2006/main">
   <p:cSld>
     <p:spTree>
@@ -6840,7 +7123,7 @@
 </p:sld>
 </file>
 
-<file path=ppt/slides/slide33.xml><?xml version="1.0" encoding="utf-8"?>
+<file path=ppt/slides/slide35.xml><?xml version="1.0" encoding="utf-8"?>
 <p:sld xmlns:a="http://schemas.openxmlformats.org/drawingml/2006/main" xmlns:r="http://schemas.openxmlformats.org/officeDocument/2006/relationships" xmlns:p="http://schemas.openxmlformats.org/presentationml/2006/main">
   <p:cSld>
     <p:spTree>
@@ -6951,7 +7234,7 @@
 </p:sld>
 </file>
 
-<file path=ppt/slides/slide34.xml><?xml version="1.0" encoding="utf-8"?>
+<file path=ppt/slides/slide36.xml><?xml version="1.0" encoding="utf-8"?>
 <p:sld xmlns:a="http://schemas.openxmlformats.org/drawingml/2006/main" xmlns:r="http://schemas.openxmlformats.org/officeDocument/2006/relationships" xmlns:p="http://schemas.openxmlformats.org/presentationml/2006/main">
   <p:cSld>
     <p:spTree>
@@ -7102,376 +7385,6 @@
 </p:sld>
 </file>
 
-<file path=ppt/slides/slide35.xml><?xml version="1.0" encoding="utf-8"?>
-<p:sld xmlns:a="http://schemas.openxmlformats.org/drawingml/2006/main" xmlns:r="http://schemas.openxmlformats.org/officeDocument/2006/relationships" xmlns:p="http://schemas.openxmlformats.org/presentationml/2006/main">
-  <p:cSld>
-    <p:spTree>
-      <p:nvGrpSpPr>
-        <p:cNvPr id="1" name=""/>
-        <p:cNvGrpSpPr/>
-        <p:nvPr/>
-      </p:nvGrpSpPr>
-      <p:grpSpPr>
-        <a:xfrm>
-          <a:off x="0" y="0"/>
-          <a:ext cx="0" cy="0"/>
-          <a:chOff x="0" y="0"/>
-          <a:chExt cx="0" cy="0"/>
-        </a:xfrm>
-      </p:grpSpPr>
-      <p:sp>
-        <p:nvSpPr>
-          <p:cNvPr id="2" name="Title 1"/>
-          <p:cNvSpPr>
-            <a:spLocks noGrp="1"/>
-          </p:cNvSpPr>
-          <p:nvPr>
-            <p:ph type="title"/>
-          </p:nvPr>
-        </p:nvSpPr>
-        <p:spPr/>
-        <p:txBody>
-          <a:bodyPr/>
-          <a:lstStyle/>
-          <a:p>
-            <a:pPr algn="l"/>
-            <a:r>
-              <a:rPr lang="en-US" dirty="0" smtClean="0"/>
-              <a:t>1. Install the demo app</a:t>
-            </a:r>
-            <a:endParaRPr lang="en-US" dirty="0"/>
-          </a:p>
-        </p:txBody>
-      </p:sp>
-      <p:sp>
-        <p:nvSpPr>
-          <p:cNvPr id="3" name="Content Placeholder 2"/>
-          <p:cNvSpPr>
-            <a:spLocks noGrp="1"/>
-          </p:cNvSpPr>
-          <p:nvPr>
-            <p:ph idx="1"/>
-          </p:nvPr>
-        </p:nvSpPr>
-        <p:spPr/>
-        <p:txBody>
-          <a:bodyPr/>
-          <a:lstStyle/>
-          <a:p>
-            <a:r>
-              <a:rPr lang="en-US" sz="2400" dirty="0" smtClean="0"/>
-              <a:t># Install </a:t>
-            </a:r>
-            <a:r>
-              <a:rPr lang="en-US" sz="2400" dirty="0" err="1" smtClean="0"/>
-              <a:t>Emojivoto</a:t>
-            </a:r>
-            <a:r>
-              <a:rPr lang="en-US" sz="2400" dirty="0" smtClean="0"/>
-              <a:t> into the </a:t>
-            </a:r>
-            <a:r>
-              <a:rPr lang="en-US" sz="2400" dirty="0" err="1" smtClean="0"/>
-              <a:t>emojivoto</a:t>
-            </a:r>
-            <a:r>
-              <a:rPr lang="en-US" sz="2400" dirty="0" smtClean="0"/>
-              <a:t> namespace:</a:t>
-            </a:r>
-          </a:p>
-          <a:p>
-            <a:r>
-              <a:rPr lang="en-US" sz="2400" dirty="0" smtClean="0">
-                <a:latin typeface="Consolas" pitchFamily="49" charset="0"/>
-              </a:rPr>
-              <a:t>curl --proto '=https' --tlsv1.2 -</a:t>
-            </a:r>
-            <a:r>
-              <a:rPr lang="en-US" sz="2400" dirty="0" err="1" smtClean="0">
-                <a:latin typeface="Consolas" pitchFamily="49" charset="0"/>
-              </a:rPr>
-              <a:t>sSfL</a:t>
-            </a:r>
-            <a:r>
-              <a:rPr lang="en-US" sz="2400" dirty="0" smtClean="0">
-                <a:latin typeface="Consolas" pitchFamily="49" charset="0"/>
-              </a:rPr>
-              <a:t> https://run.linkerd.io/emojivoto.yml | </a:t>
-            </a:r>
-            <a:r>
-              <a:rPr lang="en-US" sz="2400" dirty="0" err="1" smtClean="0">
-                <a:latin typeface="Consolas" pitchFamily="49" charset="0"/>
-              </a:rPr>
-              <a:t>kubectl</a:t>
-            </a:r>
-            <a:r>
-              <a:rPr lang="en-US" sz="2400" dirty="0" smtClean="0">
-                <a:latin typeface="Consolas" pitchFamily="49" charset="0"/>
-              </a:rPr>
-              <a:t> apply -f -</a:t>
-            </a:r>
-          </a:p>
-          <a:p>
-            <a:r>
-              <a:rPr lang="en-US" sz="2400" dirty="0" err="1" smtClean="0">
-                <a:latin typeface="Consolas" pitchFamily="49" charset="0"/>
-              </a:rPr>
-              <a:t>kubectl</a:t>
-            </a:r>
-            <a:r>
-              <a:rPr lang="en-US" sz="2400" dirty="0" smtClean="0">
-                <a:latin typeface="Consolas" pitchFamily="49" charset="0"/>
-              </a:rPr>
-              <a:t> -n </a:t>
-            </a:r>
-            <a:r>
-              <a:rPr lang="en-US" sz="2400" dirty="0" err="1" smtClean="0">
-                <a:latin typeface="Consolas" pitchFamily="49" charset="0"/>
-              </a:rPr>
-              <a:t>emojivoto</a:t>
-            </a:r>
-            <a:r>
-              <a:rPr lang="en-US" sz="2400" dirty="0" smtClean="0">
-                <a:latin typeface="Consolas" pitchFamily="49" charset="0"/>
-              </a:rPr>
-              <a:t> port-forward svc/web-svc 8080:80</a:t>
-            </a:r>
-          </a:p>
-          <a:p>
-            <a:r>
-              <a:rPr lang="en-US" sz="2400" dirty="0" smtClean="0"/>
-              <a:t># Now visit </a:t>
-            </a:r>
-            <a:r>
-              <a:rPr lang="en-US" sz="2400" dirty="0" smtClean="0">
-                <a:hlinkClick r:id="rId2"/>
-              </a:rPr>
-              <a:t>http://localhost:8080</a:t>
-            </a:r>
-            <a:endParaRPr lang="en-US" sz="2400" dirty="0" smtClean="0"/>
-          </a:p>
-        </p:txBody>
-      </p:sp>
-    </p:spTree>
-  </p:cSld>
-  <p:clrMapOvr>
-    <a:masterClrMapping/>
-  </p:clrMapOvr>
-</p:sld>
-</file>
-
-<file path=ppt/slides/slide36.xml><?xml version="1.0" encoding="utf-8"?>
-<p:sld xmlns:a="http://schemas.openxmlformats.org/drawingml/2006/main" xmlns:r="http://schemas.openxmlformats.org/officeDocument/2006/relationships" xmlns:p="http://schemas.openxmlformats.org/presentationml/2006/main">
-  <p:cSld>
-    <p:spTree>
-      <p:nvGrpSpPr>
-        <p:cNvPr id="1" name=""/>
-        <p:cNvGrpSpPr/>
-        <p:nvPr/>
-      </p:nvGrpSpPr>
-      <p:grpSpPr>
-        <a:xfrm>
-          <a:off x="0" y="0"/>
-          <a:ext cx="0" cy="0"/>
-          <a:chOff x="0" y="0"/>
-          <a:chExt cx="0" cy="0"/>
-        </a:xfrm>
-      </p:grpSpPr>
-      <p:sp>
-        <p:nvSpPr>
-          <p:cNvPr id="2" name="Title 1"/>
-          <p:cNvSpPr>
-            <a:spLocks noGrp="1"/>
-          </p:cNvSpPr>
-          <p:nvPr>
-            <p:ph type="title"/>
-          </p:nvPr>
-        </p:nvSpPr>
-        <p:spPr/>
-        <p:txBody>
-          <a:bodyPr/>
-          <a:lstStyle/>
-          <a:p>
-            <a:pPr algn="l"/>
-            <a:r>
-              <a:rPr lang="en-US" dirty="0" smtClean="0"/>
-              <a:t>2. Add </a:t>
-            </a:r>
-            <a:r>
-              <a:rPr lang="en-US" dirty="0" err="1" smtClean="0"/>
-              <a:t>Linkerd’s</a:t>
-            </a:r>
-            <a:r>
-              <a:rPr lang="en-US" dirty="0" smtClean="0"/>
-              <a:t> data plane proxies</a:t>
-            </a:r>
-            <a:endParaRPr lang="en-US" dirty="0"/>
-          </a:p>
-        </p:txBody>
-      </p:sp>
-      <p:sp>
-        <p:nvSpPr>
-          <p:cNvPr id="3" name="Content Placeholder 2"/>
-          <p:cNvSpPr>
-            <a:spLocks noGrp="1"/>
-          </p:cNvSpPr>
-          <p:nvPr>
-            <p:ph idx="1"/>
-          </p:nvPr>
-        </p:nvSpPr>
-        <p:spPr/>
-        <p:txBody>
-          <a:bodyPr/>
-          <a:lstStyle/>
-          <a:p>
-            <a:r>
-              <a:rPr lang="en-US" sz="2000" dirty="0" smtClean="0"/>
-              <a:t># This command retrieves all of the deployments running in the </a:t>
-            </a:r>
-            <a:r>
-              <a:rPr lang="en-US" sz="2000" dirty="0" err="1" smtClean="0"/>
-              <a:t>emojivoto</a:t>
-            </a:r>
-            <a:r>
-              <a:rPr lang="en-US" sz="2000" dirty="0" smtClean="0"/>
-              <a:t> namespace, runs their manifests through </a:t>
-            </a:r>
-            <a:r>
-              <a:rPr lang="en-US" sz="2000" dirty="0" err="1" smtClean="0"/>
-              <a:t>linkerd</a:t>
-            </a:r>
-            <a:r>
-              <a:rPr lang="en-US" sz="2000" dirty="0" smtClean="0"/>
-              <a:t> inject, and then reapplies it to the cluster.</a:t>
-            </a:r>
-          </a:p>
-          <a:p>
-            <a:r>
-              <a:rPr lang="en-US" sz="2000" b="1" dirty="0" err="1" smtClean="0">
-                <a:latin typeface="Consolas" pitchFamily="49" charset="0"/>
-              </a:rPr>
-              <a:t>kubectl</a:t>
-            </a:r>
-            <a:r>
-              <a:rPr lang="en-US" sz="2000" b="1" dirty="0" smtClean="0">
-                <a:latin typeface="Consolas" pitchFamily="49" charset="0"/>
-              </a:rPr>
-              <a:t> get -n </a:t>
-            </a:r>
-            <a:r>
-              <a:rPr lang="en-US" sz="2000" b="1" dirty="0" err="1" smtClean="0">
-                <a:latin typeface="Consolas" pitchFamily="49" charset="0"/>
-              </a:rPr>
-              <a:t>emojivoto</a:t>
-            </a:r>
-            <a:r>
-              <a:rPr lang="en-US" sz="2000" b="1" dirty="0" smtClean="0">
-                <a:latin typeface="Consolas" pitchFamily="49" charset="0"/>
-              </a:rPr>
-              <a:t> deploy -o </a:t>
-            </a:r>
-            <a:r>
-              <a:rPr lang="en-US" sz="2000" b="1" dirty="0" err="1" smtClean="0">
-                <a:latin typeface="Consolas" pitchFamily="49" charset="0"/>
-              </a:rPr>
-              <a:t>yaml</a:t>
-            </a:r>
-            <a:r>
-              <a:rPr lang="en-US" sz="2000" b="1" dirty="0" smtClean="0">
-                <a:latin typeface="Consolas" pitchFamily="49" charset="0"/>
-              </a:rPr>
-              <a:t>  | </a:t>
-            </a:r>
-            <a:r>
-              <a:rPr lang="en-US" sz="2000" b="1" dirty="0" err="1" smtClean="0">
-                <a:latin typeface="Consolas" pitchFamily="49" charset="0"/>
-              </a:rPr>
-              <a:t>linkerd</a:t>
-            </a:r>
-            <a:r>
-              <a:rPr lang="en-US" sz="2000" b="1" dirty="0" smtClean="0">
-                <a:latin typeface="Consolas" pitchFamily="49" charset="0"/>
-              </a:rPr>
-              <a:t> inject -  | </a:t>
-            </a:r>
-            <a:r>
-              <a:rPr lang="en-US" sz="2000" b="1" dirty="0" err="1" smtClean="0">
-                <a:latin typeface="Consolas" pitchFamily="49" charset="0"/>
-              </a:rPr>
-              <a:t>kubectl</a:t>
-            </a:r>
-            <a:r>
-              <a:rPr lang="en-US" sz="2000" b="1" dirty="0" smtClean="0">
-                <a:latin typeface="Consolas" pitchFamily="49" charset="0"/>
-              </a:rPr>
-              <a:t> apply -f -</a:t>
-            </a:r>
-          </a:p>
-          <a:p>
-            <a:r>
-              <a:rPr lang="en-US" sz="2000" b="1" dirty="0" err="1" smtClean="0">
-                <a:latin typeface="Consolas" pitchFamily="49" charset="0"/>
-              </a:rPr>
-              <a:t>linkerd</a:t>
-            </a:r>
-            <a:r>
-              <a:rPr lang="en-US" sz="2000" b="1" dirty="0" smtClean="0">
-                <a:latin typeface="Consolas" pitchFamily="49" charset="0"/>
-              </a:rPr>
-              <a:t> -n </a:t>
-            </a:r>
-            <a:r>
-              <a:rPr lang="en-US" sz="2000" b="1" dirty="0" err="1" smtClean="0">
-                <a:latin typeface="Consolas" pitchFamily="49" charset="0"/>
-              </a:rPr>
-              <a:t>emojivoto</a:t>
-            </a:r>
-            <a:r>
-              <a:rPr lang="en-US" sz="2000" b="1" dirty="0" smtClean="0">
-                <a:latin typeface="Consolas" pitchFamily="49" charset="0"/>
-              </a:rPr>
-              <a:t> check --proxy</a:t>
-            </a:r>
-          </a:p>
-          <a:p>
-            <a:r>
-              <a:rPr lang="en-US" sz="2000" b="1" dirty="0" err="1" smtClean="0">
-                <a:latin typeface="Consolas" pitchFamily="49" charset="0"/>
-              </a:rPr>
-              <a:t>kubectl</a:t>
-            </a:r>
-            <a:r>
-              <a:rPr lang="en-US" sz="2000" b="1" dirty="0" smtClean="0">
-                <a:latin typeface="Consolas" pitchFamily="49" charset="0"/>
-              </a:rPr>
-              <a:t> -n </a:t>
-            </a:r>
-            <a:r>
-              <a:rPr lang="en-US" sz="2000" b="1" dirty="0" err="1" smtClean="0">
-                <a:latin typeface="Consolas" pitchFamily="49" charset="0"/>
-              </a:rPr>
-              <a:t>emojivoto</a:t>
-            </a:r>
-            <a:r>
-              <a:rPr lang="en-US" sz="2000" b="1" dirty="0" smtClean="0">
-                <a:latin typeface="Consolas" pitchFamily="49" charset="0"/>
-              </a:rPr>
-              <a:t> port-forward svc/web-svc 8080:80</a:t>
-            </a:r>
-            <a:endParaRPr lang="en-US" sz="2000" b="1" dirty="0">
-              <a:latin typeface="Consolas" pitchFamily="49" charset="0"/>
-            </a:endParaRPr>
-          </a:p>
-        </p:txBody>
-      </p:sp>
-    </p:spTree>
-  </p:cSld>
-  <p:clrMapOvr>
-    <a:masterClrMapping/>
-  </p:clrMapOvr>
-</p:sld>
-</file>
-
 <file path=ppt/slides/slide37.xml><?xml version="1.0" encoding="utf-8"?>
 <p:sld xmlns:a="http://schemas.openxmlformats.org/drawingml/2006/main" xmlns:r="http://schemas.openxmlformats.org/officeDocument/2006/relationships" xmlns:p="http://schemas.openxmlformats.org/presentationml/2006/main">
   <p:cSld>
@@ -7507,11 +7420,7 @@
             <a:pPr algn="l"/>
             <a:r>
               <a:rPr lang="en-US" dirty="0" smtClean="0"/>
-              <a:t>3. Explore </a:t>
-            </a:r>
-            <a:r>
-              <a:rPr lang="en-US" dirty="0" err="1" smtClean="0"/>
-              <a:t>Linkerd</a:t>
+              <a:t>1. Install the demo app</a:t>
             </a:r>
             <a:endParaRPr lang="en-US" dirty="0"/>
           </a:p>
@@ -7532,47 +7441,97 @@
           <a:bodyPr/>
           <a:lstStyle/>
           <a:p>
+            <a:r>
+              <a:rPr lang="en-US" sz="2400" dirty="0" smtClean="0"/>
+              <a:t># Install </a:t>
+            </a:r>
+            <a:r>
+              <a:rPr lang="en-US" sz="2400" dirty="0" err="1" smtClean="0"/>
+              <a:t>Emojivoto</a:t>
+            </a:r>
+            <a:r>
+              <a:rPr lang="en-US" sz="2400" dirty="0" smtClean="0"/>
+              <a:t> into the </a:t>
+            </a:r>
+            <a:r>
+              <a:rPr lang="en-US" sz="2400" dirty="0" err="1" smtClean="0"/>
+              <a:t>emojivoto</a:t>
+            </a:r>
+            <a:r>
+              <a:rPr lang="en-US" sz="2400" dirty="0" smtClean="0"/>
+              <a:t> namespace:</a:t>
+            </a:r>
+          </a:p>
+          <a:p>
+            <a:r>
+              <a:rPr lang="en-US" sz="2400" dirty="0" smtClean="0">
+                <a:latin typeface="Consolas" pitchFamily="49" charset="0"/>
+              </a:rPr>
+              <a:t>curl --proto '=https' --tlsv1.2 -</a:t>
+            </a:r>
             <a:r>
               <a:rPr lang="en-US" sz="2400" dirty="0" err="1" smtClean="0">
                 <a:latin typeface="Consolas" pitchFamily="49" charset="0"/>
               </a:rPr>
-              <a:t>linkerd</a:t>
+              <a:t>sSfL</a:t>
             </a:r>
             <a:r>
               <a:rPr lang="en-US" sz="2400" dirty="0" smtClean="0">
                 <a:latin typeface="Consolas" pitchFamily="49" charset="0"/>
               </a:rPr>
-              <a:t> </a:t>
+              <a:t> https://run.linkerd.io/emojivoto.yml | </a:t>
             </a:r>
             <a:r>
               <a:rPr lang="en-US" sz="2400" dirty="0" err="1" smtClean="0">
                 <a:latin typeface="Consolas" pitchFamily="49" charset="0"/>
               </a:rPr>
-              <a:t>viz</a:t>
+              <a:t>kubectl</a:t>
             </a:r>
             <a:r>
               <a:rPr lang="en-US" sz="2400" dirty="0" smtClean="0">
                 <a:latin typeface="Consolas" pitchFamily="49" charset="0"/>
               </a:rPr>
-              <a:t> dashboard &amp;</a:t>
-            </a:r>
-          </a:p>
-          <a:p>
+              <a:t> apply -f -</a:t>
+            </a:r>
+          </a:p>
+          <a:p>
+            <a:r>
+              <a:rPr lang="en-US" sz="2400" dirty="0" err="1" smtClean="0">
+                <a:latin typeface="Consolas" pitchFamily="49" charset="0"/>
+              </a:rPr>
+              <a:t>kubectl</a:t>
+            </a:r>
             <a:r>
               <a:rPr lang="en-US" sz="2400" dirty="0" smtClean="0">
-                <a:latin typeface="+mj-lt"/>
-              </a:rPr>
-              <a:t># Review Namespaces &gt; </a:t>
+                <a:latin typeface="Consolas" pitchFamily="49" charset="0"/>
+              </a:rPr>
+              <a:t> -n </a:t>
             </a:r>
             <a:r>
               <a:rPr lang="en-US" sz="2400" dirty="0" err="1" smtClean="0">
-                <a:latin typeface="+mj-lt"/>
+                <a:latin typeface="Consolas" pitchFamily="49" charset="0"/>
               </a:rPr>
               <a:t>emojivoto</a:t>
             </a:r>
-            <a:endParaRPr lang="en-US" sz="2400" dirty="0">
-              <a:latin typeface="+mj-lt"/>
-            </a:endParaRPr>
+            <a:r>
+              <a:rPr lang="en-US" sz="2400" dirty="0" smtClean="0">
+                <a:latin typeface="Consolas" pitchFamily="49" charset="0"/>
+              </a:rPr>
+              <a:t> port-forward svc/web-svc 8080:80</a:t>
+            </a:r>
+          </a:p>
+          <a:p>
+            <a:r>
+              <a:rPr lang="en-US" sz="2400" dirty="0" smtClean="0"/>
+              <a:t># Now visit </a:t>
+            </a:r>
+            <a:r>
+              <a:rPr lang="en-US" sz="2400" dirty="0" smtClean="0">
+                <a:hlinkClick r:id="rId2"/>
+              </a:rPr>
+              <a:t>http://localhost:8080</a:t>
+            </a:r>
+            <a:endParaRPr lang="en-US" sz="2400" dirty="0" smtClean="0"/>
           </a:p>
         </p:txBody>
       </p:sp>
@@ -7601,32 +7560,193 @@
           <a:chExt cx="0" cy="0"/>
         </a:xfrm>
       </p:grpSpPr>
-      <p:pic>
-        <p:nvPicPr>
-          <p:cNvPr id="4" name="Picture 2" descr="https://lh3.ggpht.com/1IfZLL2QDSjZ0wS7sUhaMlsAOS8BBzdR3wZ1WawgRn7KZAM8nEVZYMOUM-lqQb0ikIzp=w300"/>
-          <p:cNvPicPr>
-            <a:picLocks noChangeAspect="1" noChangeArrowheads="1"/>
-          </p:cNvPicPr>
-          <p:nvPr/>
-        </p:nvPicPr>
-        <p:blipFill>
-          <a:blip r:embed="rId2" cstate="print"/>
-          <a:srcRect/>
-          <a:stretch>
-            <a:fillRect/>
-          </a:stretch>
-        </p:blipFill>
-        <p:spPr bwMode="auto">
-          <a:xfrm>
-            <a:off x="3276600" y="1905000"/>
-            <a:ext cx="2857500" cy="2857500"/>
-          </a:xfrm>
-          <a:prstGeom prst="rect">
-            <a:avLst/>
-          </a:prstGeom>
-          <a:noFill/>
-        </p:spPr>
-      </p:pic>
+      <p:sp>
+        <p:nvSpPr>
+          <p:cNvPr id="2" name="Title 1"/>
+          <p:cNvSpPr>
+            <a:spLocks noGrp="1"/>
+          </p:cNvSpPr>
+          <p:nvPr>
+            <p:ph type="title"/>
+          </p:nvPr>
+        </p:nvSpPr>
+        <p:spPr/>
+        <p:txBody>
+          <a:bodyPr/>
+          <a:lstStyle/>
+          <a:p>
+            <a:pPr algn="l"/>
+            <a:r>
+              <a:rPr lang="en-US" dirty="0" smtClean="0"/>
+              <a:t>2. Add </a:t>
+            </a:r>
+            <a:r>
+              <a:rPr lang="en-US" dirty="0" err="1" smtClean="0"/>
+              <a:t>Linkerd’s</a:t>
+            </a:r>
+            <a:r>
+              <a:rPr lang="en-US" dirty="0" smtClean="0"/>
+              <a:t> data plane proxies</a:t>
+            </a:r>
+            <a:endParaRPr lang="en-US" dirty="0"/>
+          </a:p>
+        </p:txBody>
+      </p:sp>
+      <p:sp>
+        <p:nvSpPr>
+          <p:cNvPr id="3" name="Content Placeholder 2"/>
+          <p:cNvSpPr>
+            <a:spLocks noGrp="1"/>
+          </p:cNvSpPr>
+          <p:nvPr>
+            <p:ph idx="1"/>
+          </p:nvPr>
+        </p:nvSpPr>
+        <p:spPr/>
+        <p:txBody>
+          <a:bodyPr/>
+          <a:lstStyle/>
+          <a:p>
+            <a:r>
+              <a:rPr lang="en-US" sz="2000" dirty="0" smtClean="0"/>
+              <a:t># This command retrieves all of the deployments running in the </a:t>
+            </a:r>
+            <a:r>
+              <a:rPr lang="en-US" sz="2000" dirty="0" err="1" smtClean="0"/>
+              <a:t>emojivoto</a:t>
+            </a:r>
+            <a:r>
+              <a:rPr lang="en-US" sz="2000" dirty="0" smtClean="0"/>
+              <a:t> namespace, runs their manifests through </a:t>
+            </a:r>
+            <a:r>
+              <a:rPr lang="en-US" sz="2000" dirty="0" err="1" smtClean="0"/>
+              <a:t>linkerd</a:t>
+            </a:r>
+            <a:r>
+              <a:rPr lang="en-US" sz="2000" dirty="0" smtClean="0"/>
+              <a:t> inject, and then reapplies it to the cluster.</a:t>
+            </a:r>
+          </a:p>
+          <a:p>
+            <a:r>
+              <a:rPr lang="en-US" sz="2000" b="1" dirty="0" err="1" smtClean="0">
+                <a:latin typeface="Consolas" pitchFamily="49" charset="0"/>
+              </a:rPr>
+              <a:t>kubectl</a:t>
+            </a:r>
+            <a:r>
+              <a:rPr lang="en-US" sz="2000" b="1" dirty="0" smtClean="0">
+                <a:latin typeface="Consolas" pitchFamily="49" charset="0"/>
+              </a:rPr>
+              <a:t> get -n </a:t>
+            </a:r>
+            <a:r>
+              <a:rPr lang="en-US" sz="2000" b="1" dirty="0" err="1" smtClean="0">
+                <a:latin typeface="Consolas" pitchFamily="49" charset="0"/>
+              </a:rPr>
+              <a:t>emojivoto</a:t>
+            </a:r>
+            <a:r>
+              <a:rPr lang="en-US" sz="2000" b="1" dirty="0" smtClean="0">
+                <a:latin typeface="Consolas" pitchFamily="49" charset="0"/>
+              </a:rPr>
+              <a:t> deploy -o </a:t>
+            </a:r>
+            <a:r>
+              <a:rPr lang="en-US" sz="2000" b="1" dirty="0" err="1" smtClean="0">
+                <a:latin typeface="Consolas" pitchFamily="49" charset="0"/>
+              </a:rPr>
+              <a:t>yaml</a:t>
+            </a:r>
+            <a:r>
+              <a:rPr lang="en-US" sz="2000" b="1" dirty="0" smtClean="0">
+                <a:latin typeface="Consolas" pitchFamily="49" charset="0"/>
+              </a:rPr>
+              <a:t>  | </a:t>
+            </a:r>
+            <a:r>
+              <a:rPr lang="en-US" sz="2000" b="1" dirty="0" err="1" smtClean="0">
+                <a:latin typeface="Consolas" pitchFamily="49" charset="0"/>
+              </a:rPr>
+              <a:t>linkerd</a:t>
+            </a:r>
+            <a:r>
+              <a:rPr lang="en-US" sz="2000" b="1" dirty="0" smtClean="0">
+                <a:latin typeface="Consolas" pitchFamily="49" charset="0"/>
+              </a:rPr>
+              <a:t> inject -  | </a:t>
+            </a:r>
+            <a:r>
+              <a:rPr lang="en-US" sz="2000" b="1" dirty="0" err="1" smtClean="0">
+                <a:latin typeface="Consolas" pitchFamily="49" charset="0"/>
+              </a:rPr>
+              <a:t>kubectl</a:t>
+            </a:r>
+            <a:r>
+              <a:rPr lang="en-US" sz="2000" b="1" dirty="0" smtClean="0">
+                <a:latin typeface="Consolas" pitchFamily="49" charset="0"/>
+              </a:rPr>
+              <a:t> apply -f -</a:t>
+            </a:r>
+          </a:p>
+          <a:p>
+            <a:r>
+              <a:rPr lang="en-US" sz="2000" b="1" dirty="0" err="1" smtClean="0">
+                <a:latin typeface="Consolas" pitchFamily="49" charset="0"/>
+              </a:rPr>
+              <a:t>linkerd</a:t>
+            </a:r>
+            <a:r>
+              <a:rPr lang="en-US" sz="2000" b="1" dirty="0" smtClean="0">
+                <a:latin typeface="Consolas" pitchFamily="49" charset="0"/>
+              </a:rPr>
+              <a:t> -n </a:t>
+            </a:r>
+            <a:r>
+              <a:rPr lang="en-US" sz="2000" b="1" dirty="0" err="1" smtClean="0">
+                <a:latin typeface="Consolas" pitchFamily="49" charset="0"/>
+              </a:rPr>
+              <a:t>emojivoto</a:t>
+            </a:r>
+            <a:r>
+              <a:rPr lang="en-US" sz="2000" b="1" dirty="0" smtClean="0">
+                <a:latin typeface="Consolas" pitchFamily="49" charset="0"/>
+              </a:rPr>
+              <a:t> check --proxy</a:t>
+            </a:r>
+          </a:p>
+          <a:p>
+            <a:r>
+              <a:rPr lang="en-US" sz="2000" b="1" dirty="0" err="1" smtClean="0">
+                <a:latin typeface="Consolas" pitchFamily="49" charset="0"/>
+              </a:rPr>
+              <a:t>kubectl</a:t>
+            </a:r>
+            <a:r>
+              <a:rPr lang="en-US" sz="2000" b="1" dirty="0" smtClean="0">
+                <a:latin typeface="Consolas" pitchFamily="49" charset="0"/>
+              </a:rPr>
+              <a:t> -n </a:t>
+            </a:r>
+            <a:r>
+              <a:rPr lang="en-US" sz="2000" b="1" dirty="0" err="1" smtClean="0">
+                <a:latin typeface="Consolas" pitchFamily="49" charset="0"/>
+              </a:rPr>
+              <a:t>emojivoto</a:t>
+            </a:r>
+            <a:r>
+              <a:rPr lang="en-US" sz="2000" b="1" dirty="0" smtClean="0">
+                <a:latin typeface="Consolas" pitchFamily="49" charset="0"/>
+              </a:rPr>
+              <a:t> port-forward svc/web-svc 8080:80</a:t>
+            </a:r>
+            <a:endParaRPr lang="en-US" sz="2000" b="1" dirty="0">
+              <a:latin typeface="Consolas" pitchFamily="49" charset="0"/>
+            </a:endParaRPr>
+          </a:p>
+        </p:txBody>
+      </p:sp>
     </p:spTree>
   </p:cSld>
   <p:clrMapOvr>
@@ -7667,9 +7787,14 @@
           <a:bodyPr/>
           <a:lstStyle/>
           <a:p>
+            <a:pPr algn="l"/>
             <a:r>
               <a:rPr lang="en-US" dirty="0" smtClean="0"/>
-              <a:t>.NET Example</a:t>
+              <a:t>3. Explore </a:t>
+            </a:r>
+            <a:r>
+              <a:rPr lang="en-US" dirty="0" err="1" smtClean="0"/>
+              <a:t>Linkerd</a:t>
             </a:r>
             <a:endParaRPr lang="en-US" dirty="0"/>
           </a:p>
@@ -7691,15 +7816,46 @@
           <a:lstStyle/>
           <a:p>
             <a:r>
+              <a:rPr lang="en-US" sz="2400" dirty="0" err="1" smtClean="0">
+                <a:latin typeface="Consolas" pitchFamily="49" charset="0"/>
+              </a:rPr>
+              <a:t>linkerd</a:t>
+            </a:r>
+            <a:r>
               <a:rPr lang="en-US" sz="2400" dirty="0" smtClean="0">
-                <a:hlinkClick r:id="rId2"/>
-              </a:rPr>
-              <a:t>https://dotnetfullstackdev.medium.com/service-mesh-with-linkerd-in-a-net-microservice-architecture-e87d3d406b06</a:t>
-            </a:r>
-            <a:endParaRPr lang="en-US" sz="2400" dirty="0" smtClean="0"/>
-          </a:p>
-          <a:p>
-            <a:endParaRPr lang="en-US" sz="2400" dirty="0"/>
+                <a:latin typeface="Consolas" pitchFamily="49" charset="0"/>
+              </a:rPr>
+              <a:t> </a:t>
+            </a:r>
+            <a:r>
+              <a:rPr lang="en-US" sz="2400" dirty="0" err="1" smtClean="0">
+                <a:latin typeface="Consolas" pitchFamily="49" charset="0"/>
+              </a:rPr>
+              <a:t>viz</a:t>
+            </a:r>
+            <a:r>
+              <a:rPr lang="en-US" sz="2400" dirty="0" smtClean="0">
+                <a:latin typeface="Consolas" pitchFamily="49" charset="0"/>
+              </a:rPr>
+              <a:t> dashboard &amp;</a:t>
+            </a:r>
+          </a:p>
+          <a:p>
+            <a:r>
+              <a:rPr lang="en-US" sz="2400" dirty="0" smtClean="0">
+                <a:latin typeface="+mj-lt"/>
+              </a:rPr>
+              <a:t># Review Namespaces &gt; </a:t>
+            </a:r>
+            <a:r>
+              <a:rPr lang="en-US" sz="2400" dirty="0" err="1" smtClean="0">
+                <a:latin typeface="+mj-lt"/>
+              </a:rPr>
+              <a:t>emojivoto</a:t>
+            </a:r>
+            <a:endParaRPr lang="en-US" sz="2400" dirty="0">
+              <a:latin typeface="+mj-lt"/>
+            </a:endParaRPr>
           </a:p>
         </p:txBody>
       </p:sp>
@@ -7942,6 +8098,133 @@
           <a:p>
             <a:r>
               <a:rPr lang="en-US" dirty="0" smtClean="0"/>
+              <a:t>.NET Example</a:t>
+            </a:r>
+            <a:endParaRPr lang="en-US" dirty="0"/>
+          </a:p>
+        </p:txBody>
+      </p:sp>
+      <p:sp>
+        <p:nvSpPr>
+          <p:cNvPr id="3" name="Content Placeholder 2"/>
+          <p:cNvSpPr>
+            <a:spLocks noGrp="1"/>
+          </p:cNvSpPr>
+          <p:nvPr>
+            <p:ph idx="1"/>
+          </p:nvPr>
+        </p:nvSpPr>
+        <p:spPr/>
+        <p:txBody>
+          <a:bodyPr/>
+          <a:lstStyle/>
+          <a:p>
+            <a:r>
+              <a:rPr lang="en-US" sz="2400" dirty="0" smtClean="0">
+                <a:hlinkClick r:id="rId2"/>
+              </a:rPr>
+              <a:t>https://dotnetfullstackdev.medium.com/service-mesh-with-linkerd-in-a-net-microservice-architecture-e87d3d406b06</a:t>
+            </a:r>
+            <a:endParaRPr lang="en-US" sz="2400" dirty="0" smtClean="0"/>
+          </a:p>
+          <a:p>
+            <a:endParaRPr lang="en-US" sz="2400" dirty="0"/>
+          </a:p>
+        </p:txBody>
+      </p:sp>
+    </p:spTree>
+  </p:cSld>
+  <p:clrMapOvr>
+    <a:masterClrMapping/>
+  </p:clrMapOvr>
+</p:sld>
+</file>
+
+<file path=ppt/slides/slide42.xml><?xml version="1.0" encoding="utf-8"?>
+<p:sld xmlns:a="http://schemas.openxmlformats.org/drawingml/2006/main" xmlns:r="http://schemas.openxmlformats.org/officeDocument/2006/relationships" xmlns:p="http://schemas.openxmlformats.org/presentationml/2006/main">
+  <p:cSld>
+    <p:spTree>
+      <p:nvGrpSpPr>
+        <p:cNvPr id="1" name=""/>
+        <p:cNvGrpSpPr/>
+        <p:nvPr/>
+      </p:nvGrpSpPr>
+      <p:grpSpPr>
+        <a:xfrm>
+          <a:off x="0" y="0"/>
+          <a:ext cx="0" cy="0"/>
+          <a:chOff x="0" y="0"/>
+          <a:chExt cx="0" cy="0"/>
+        </a:xfrm>
+      </p:grpSpPr>
+      <p:pic>
+        <p:nvPicPr>
+          <p:cNvPr id="4" name="Picture 2" descr="https://lh3.ggpht.com/1IfZLL2QDSjZ0wS7sUhaMlsAOS8BBzdR3wZ1WawgRn7KZAM8nEVZYMOUM-lqQb0ikIzp=w300"/>
+          <p:cNvPicPr>
+            <a:picLocks noChangeAspect="1" noChangeArrowheads="1"/>
+          </p:cNvPicPr>
+          <p:nvPr/>
+        </p:nvPicPr>
+        <p:blipFill>
+          <a:blip r:embed="rId2" cstate="print"/>
+          <a:srcRect/>
+          <a:stretch>
+            <a:fillRect/>
+          </a:stretch>
+        </p:blipFill>
+        <p:spPr bwMode="auto">
+          <a:xfrm>
+            <a:off x="3276600" y="1905000"/>
+            <a:ext cx="2857500" cy="2857500"/>
+          </a:xfrm>
+          <a:prstGeom prst="rect">
+            <a:avLst/>
+          </a:prstGeom>
+          <a:noFill/>
+        </p:spPr>
+      </p:pic>
+    </p:spTree>
+  </p:cSld>
+  <p:clrMapOvr>
+    <a:masterClrMapping/>
+  </p:clrMapOvr>
+</p:sld>
+</file>
+
+<file path=ppt/slides/slide43.xml><?xml version="1.0" encoding="utf-8"?>
+<p:sld xmlns:a="http://schemas.openxmlformats.org/drawingml/2006/main" xmlns:r="http://schemas.openxmlformats.org/officeDocument/2006/relationships" xmlns:p="http://schemas.openxmlformats.org/presentationml/2006/main">
+  <p:cSld>
+    <p:spTree>
+      <p:nvGrpSpPr>
+        <p:cNvPr id="1" name=""/>
+        <p:cNvGrpSpPr/>
+        <p:nvPr/>
+      </p:nvGrpSpPr>
+      <p:grpSpPr>
+        <a:xfrm>
+          <a:off x="0" y="0"/>
+          <a:ext cx="0" cy="0"/>
+          <a:chOff x="0" y="0"/>
+          <a:chExt cx="0" cy="0"/>
+        </a:xfrm>
+      </p:grpSpPr>
+      <p:sp>
+        <p:nvSpPr>
+          <p:cNvPr id="2" name="Title 1"/>
+          <p:cNvSpPr>
+            <a:spLocks noGrp="1"/>
+          </p:cNvSpPr>
+          <p:nvPr>
+            <p:ph type="title"/>
+          </p:nvPr>
+        </p:nvSpPr>
+        <p:spPr/>
+        <p:txBody>
+          <a:bodyPr/>
+          <a:lstStyle/>
+          <a:p>
+            <a:r>
+              <a:rPr lang="en-US" dirty="0" smtClean="0"/>
               <a:t>A typical software stack [3]</a:t>
             </a:r>
             <a:endParaRPr lang="en-US" dirty="0"/>
@@ -7988,7 +8271,7 @@
 </p:sld>
 </file>
 
-<file path=ppt/slides/slide42.xml><?xml version="1.0" encoding="utf-8"?>
+<file path=ppt/slides/slide44.xml><?xml version="1.0" encoding="utf-8"?>
 <p:sld xmlns:a="http://schemas.openxmlformats.org/drawingml/2006/main" xmlns:r="http://schemas.openxmlformats.org/officeDocument/2006/relationships" xmlns:p="http://schemas.openxmlformats.org/presentationml/2006/main">
   <p:cSld>
     <p:spTree>
@@ -8147,7 +8430,7 @@
 </p:sld>
 </file>
 
-<file path=ppt/slides/slide43.xml><?xml version="1.0" encoding="utf-8"?>
+<file path=ppt/slides/slide45.xml><?xml version="1.0" encoding="utf-8"?>
 <p:sld xmlns:a="http://schemas.openxmlformats.org/drawingml/2006/main" xmlns:r="http://schemas.openxmlformats.org/officeDocument/2006/relationships" xmlns:p="http://schemas.openxmlformats.org/presentationml/2006/main">
   <p:cSld>
     <p:spTree>
@@ -8262,7 +8545,7 @@
 </p:sld>
 </file>
 
-<file path=ppt/slides/slide44.xml><?xml version="1.0" encoding="utf-8"?>
+<file path=ppt/slides/slide46.xml><?xml version="1.0" encoding="utf-8"?>
 <p:sld xmlns:a="http://schemas.openxmlformats.org/drawingml/2006/main" xmlns:r="http://schemas.openxmlformats.org/officeDocument/2006/relationships" xmlns:p="http://schemas.openxmlformats.org/presentationml/2006/main">
   <p:cSld>
     <p:spTree>
@@ -8342,7 +8625,7 @@
 </p:sld>
 </file>
 
-<file path=ppt/slides/slide45.xml><?xml version="1.0" encoding="utf-8"?>
+<file path=ppt/slides/slide47.xml><?xml version="1.0" encoding="utf-8"?>
 <p:sld xmlns:a="http://schemas.openxmlformats.org/drawingml/2006/main" xmlns:r="http://schemas.openxmlformats.org/officeDocument/2006/relationships" xmlns:p="http://schemas.openxmlformats.org/presentationml/2006/main">
   <p:cSld>
     <p:spTree>
@@ -8439,7 +8722,7 @@
 </p:sld>
 </file>
 
-<file path=ppt/slides/slide46.xml><?xml version="1.0" encoding="utf-8"?>
+<file path=ppt/slides/slide48.xml><?xml version="1.0" encoding="utf-8"?>
 <p:sld xmlns:a="http://schemas.openxmlformats.org/drawingml/2006/main" xmlns:r="http://schemas.openxmlformats.org/officeDocument/2006/relationships" xmlns:p="http://schemas.openxmlformats.org/presentationml/2006/main">
   <p:cSld>
     <p:spTree>
@@ -8538,7 +8821,7 @@
 </p:sld>
 </file>
 
-<file path=ppt/slides/slide47.xml><?xml version="1.0" encoding="utf-8"?>
+<file path=ppt/slides/slide49.xml><?xml version="1.0" encoding="utf-8"?>
 <p:sld xmlns:a="http://schemas.openxmlformats.org/drawingml/2006/main" xmlns:r="http://schemas.openxmlformats.org/officeDocument/2006/relationships" xmlns:p="http://schemas.openxmlformats.org/presentationml/2006/main">
   <p:cSld>
     <p:spTree>
@@ -8642,7 +8925,165 @@
 </p:sld>
 </file>
 
-<file path=ppt/slides/slide48.xml><?xml version="1.0" encoding="utf-8"?>
+<file path=ppt/slides/slide5.xml><?xml version="1.0" encoding="utf-8"?>
+<p:sld xmlns:a="http://schemas.openxmlformats.org/drawingml/2006/main" xmlns:r="http://schemas.openxmlformats.org/officeDocument/2006/relationships" xmlns:p="http://schemas.openxmlformats.org/presentationml/2006/main">
+  <p:cSld>
+    <p:spTree>
+      <p:nvGrpSpPr>
+        <p:cNvPr id="1" name=""/>
+        <p:cNvGrpSpPr/>
+        <p:nvPr/>
+      </p:nvGrpSpPr>
+      <p:grpSpPr>
+        <a:xfrm>
+          <a:off x="0" y="0"/>
+          <a:ext cx="0" cy="0"/>
+          <a:chOff x="0" y="0"/>
+          <a:chExt cx="0" cy="0"/>
+        </a:xfrm>
+      </p:grpSpPr>
+      <p:sp>
+        <p:nvSpPr>
+          <p:cNvPr id="2" name="Title 1"/>
+          <p:cNvSpPr>
+            <a:spLocks noGrp="1"/>
+          </p:cNvSpPr>
+          <p:nvPr>
+            <p:ph type="title"/>
+          </p:nvPr>
+        </p:nvSpPr>
+        <p:spPr/>
+        <p:txBody>
+          <a:bodyPr/>
+          <a:lstStyle/>
+          <a:p>
+            <a:r>
+              <a:rPr lang="en-US" dirty="0" smtClean="0"/>
+              <a:t>Introduction to Service Mesh [1]</a:t>
+            </a:r>
+            <a:endParaRPr lang="en-US" dirty="0"/>
+          </a:p>
+        </p:txBody>
+      </p:sp>
+      <p:sp>
+        <p:nvSpPr>
+          <p:cNvPr id="3" name="Content Placeholder 2"/>
+          <p:cNvSpPr>
+            <a:spLocks noGrp="1"/>
+          </p:cNvSpPr>
+          <p:nvPr>
+            <p:ph idx="1"/>
+          </p:nvPr>
+        </p:nvSpPr>
+        <p:spPr/>
+        <p:txBody>
+          <a:bodyPr/>
+          <a:lstStyle/>
+          <a:p>
+            <a:r>
+              <a:rPr lang="en-US" sz="2400" dirty="0" smtClean="0"/>
+              <a:t>A </a:t>
+            </a:r>
+            <a:r>
+              <a:rPr lang="en-US" sz="2400" i="1" dirty="0" smtClean="0">
+                <a:solidFill>
+                  <a:srgbClr val="C00000"/>
+                </a:solidFill>
+              </a:rPr>
+              <a:t>dedicated infrastructure layer</a:t>
+            </a:r>
+            <a:r>
+              <a:rPr lang="en-US" sz="2400" dirty="0" smtClean="0"/>
+              <a:t> over </a:t>
+            </a:r>
+            <a:r>
+              <a:rPr lang="en-US" sz="2400" dirty="0" err="1" smtClean="0"/>
+              <a:t>microservices</a:t>
+            </a:r>
+            <a:r>
+              <a:rPr lang="en-US" sz="2400" dirty="0" smtClean="0"/>
+              <a:t> without imposing modification on the service implementations.</a:t>
+            </a:r>
+          </a:p>
+          <a:p>
+            <a:r>
+              <a:rPr lang="en-US" sz="2400" dirty="0" smtClean="0"/>
+              <a:t>Serving as a fully manageable </a:t>
+            </a:r>
+            <a:r>
+              <a:rPr lang="en-US" sz="2400" i="1" dirty="0" smtClean="0">
+                <a:solidFill>
+                  <a:srgbClr val="C00000"/>
+                </a:solidFill>
+              </a:rPr>
+              <a:t>service-to-service communication platform</a:t>
+            </a:r>
+            <a:r>
+              <a:rPr lang="en-US" sz="2400" dirty="0" smtClean="0"/>
+              <a:t>, a service mesh is designed to </a:t>
+            </a:r>
+            <a:r>
+              <a:rPr lang="en-US" sz="2400" u="sng" dirty="0" smtClean="0"/>
+              <a:t>standardize</a:t>
+            </a:r>
+            <a:r>
+              <a:rPr lang="en-US" sz="2400" dirty="0" smtClean="0"/>
+              <a:t> the runtime operations of applications.</a:t>
+            </a:r>
+          </a:p>
+          <a:p>
+            <a:r>
+              <a:rPr lang="en-US" sz="2400" dirty="0" smtClean="0"/>
+              <a:t>The service mesh technologies hold the promise in addressing</a:t>
+            </a:r>
+          </a:p>
+          <a:p>
+            <a:pPr lvl="1"/>
+            <a:r>
+              <a:rPr lang="en-US" sz="2000" dirty="0" smtClean="0"/>
+              <a:t>communication-related concerns</a:t>
+            </a:r>
+          </a:p>
+          <a:p>
+            <a:pPr lvl="1"/>
+            <a:r>
+              <a:rPr lang="en-US" sz="2000" dirty="0" smtClean="0"/>
+              <a:t>interoperability</a:t>
+            </a:r>
+          </a:p>
+          <a:p>
+            <a:pPr lvl="1"/>
+            <a:r>
+              <a:rPr lang="en-US" sz="2000" dirty="0" smtClean="0"/>
+              <a:t>traffic segmentation</a:t>
+            </a:r>
+          </a:p>
+          <a:p>
+            <a:pPr lvl="1"/>
+            <a:r>
+              <a:rPr lang="en-US" sz="2000" dirty="0" smtClean="0"/>
+              <a:t>dependency control</a:t>
+            </a:r>
+          </a:p>
+          <a:p>
+            <a:pPr lvl="1"/>
+            <a:r>
+              <a:rPr lang="en-US" sz="2000" dirty="0" smtClean="0"/>
+              <a:t>runtime enforcement</a:t>
+            </a:r>
+            <a:endParaRPr lang="en-US" sz="2000" dirty="0"/>
+          </a:p>
+        </p:txBody>
+      </p:sp>
+    </p:spTree>
+  </p:cSld>
+  <p:clrMapOvr>
+    <a:masterClrMapping/>
+  </p:clrMapOvr>
+</p:sld>
+</file>
+
+<file path=ppt/slides/slide50.xml><?xml version="1.0" encoding="utf-8"?>
 <p:sld xmlns:a="http://schemas.openxmlformats.org/drawingml/2006/main" xmlns:r="http://schemas.openxmlformats.org/officeDocument/2006/relationships" xmlns:p="http://schemas.openxmlformats.org/presentationml/2006/main">
   <p:cSld>
     <p:spTree>
@@ -8746,7 +9187,7 @@
 </p:sld>
 </file>
 
-<file path=ppt/slides/slide49.xml><?xml version="1.0" encoding="utf-8"?>
+<file path=ppt/slides/slide51.xml><?xml version="1.0" encoding="utf-8"?>
 <p:sld xmlns:a="http://schemas.openxmlformats.org/drawingml/2006/main" xmlns:r="http://schemas.openxmlformats.org/officeDocument/2006/relationships" xmlns:p="http://schemas.openxmlformats.org/presentationml/2006/main">
   <p:cSld>
     <p:spTree>
@@ -8850,163 +9291,7 @@
 </p:sld>
 </file>
 
-<file path=ppt/slides/slide5.xml><?xml version="1.0" encoding="utf-8"?>
-<p:sld xmlns:a="http://schemas.openxmlformats.org/drawingml/2006/main" xmlns:r="http://schemas.openxmlformats.org/officeDocument/2006/relationships" xmlns:p="http://schemas.openxmlformats.org/presentationml/2006/main">
-  <p:cSld>
-    <p:spTree>
-      <p:nvGrpSpPr>
-        <p:cNvPr id="1" name=""/>
-        <p:cNvGrpSpPr/>
-        <p:nvPr/>
-      </p:nvGrpSpPr>
-      <p:grpSpPr>
-        <a:xfrm>
-          <a:off x="0" y="0"/>
-          <a:ext cx="0" cy="0"/>
-          <a:chOff x="0" y="0"/>
-          <a:chExt cx="0" cy="0"/>
-        </a:xfrm>
-      </p:grpSpPr>
-      <p:sp>
-        <p:nvSpPr>
-          <p:cNvPr id="2" name="Title 1"/>
-          <p:cNvSpPr>
-            <a:spLocks noGrp="1"/>
-          </p:cNvSpPr>
-          <p:nvPr>
-            <p:ph type="title"/>
-          </p:nvPr>
-        </p:nvSpPr>
-        <p:spPr/>
-        <p:txBody>
-          <a:bodyPr/>
-          <a:lstStyle/>
-          <a:p>
-            <a:r>
-              <a:rPr lang="en-US" dirty="0" smtClean="0"/>
-              <a:t>Why? </a:t>
-            </a:r>
-            <a:r>
-              <a:rPr lang="en-US" smtClean="0"/>
-              <a:t>[1]</a:t>
-            </a:r>
-            <a:endParaRPr lang="en-US" dirty="0"/>
-          </a:p>
-        </p:txBody>
-      </p:sp>
-      <p:sp>
-        <p:nvSpPr>
-          <p:cNvPr id="3" name="Content Placeholder 2"/>
-          <p:cNvSpPr>
-            <a:spLocks noGrp="1"/>
-          </p:cNvSpPr>
-          <p:nvPr>
-            <p:ph idx="1"/>
-          </p:nvPr>
-        </p:nvSpPr>
-        <p:spPr/>
-        <p:txBody>
-          <a:bodyPr/>
-          <a:lstStyle/>
-          <a:p>
-            <a:r>
-              <a:rPr lang="en-US" sz="2400" dirty="0" smtClean="0"/>
-              <a:t>Debugging </a:t>
-            </a:r>
-            <a:r>
-              <a:rPr lang="en-US" sz="2400" dirty="0" err="1" smtClean="0"/>
-              <a:t>microservices</a:t>
-            </a:r>
-            <a:r>
-              <a:rPr lang="en-US" sz="2400" dirty="0" smtClean="0"/>
-              <a:t> applications turns out to be a challenging task due to </a:t>
-            </a:r>
-          </a:p>
-          <a:p>
-            <a:pPr lvl="1"/>
-            <a:r>
-              <a:rPr lang="en-US" sz="2000" dirty="0" smtClean="0"/>
-              <a:t>the </a:t>
-            </a:r>
-            <a:r>
-              <a:rPr lang="en-US" sz="2000" i="1" dirty="0" smtClean="0">
-                <a:solidFill>
-                  <a:srgbClr val="C00000"/>
-                </a:solidFill>
-              </a:rPr>
-              <a:t>complexity of service dependencies</a:t>
-            </a:r>
-            <a:r>
-              <a:rPr lang="en-US" sz="2000" dirty="0" smtClean="0"/>
-              <a:t> and </a:t>
-            </a:r>
-          </a:p>
-          <a:p>
-            <a:pPr lvl="1"/>
-            <a:r>
-              <a:rPr lang="en-US" sz="2000" dirty="0" smtClean="0"/>
-              <a:t>the fact that any service can become </a:t>
-            </a:r>
-            <a:r>
-              <a:rPr lang="en-US" sz="2000" i="1" dirty="0" smtClean="0">
-                <a:solidFill>
-                  <a:srgbClr val="C00000"/>
-                </a:solidFill>
-              </a:rPr>
-              <a:t>temporarily inaccessible</a:t>
-            </a:r>
-            <a:r>
-              <a:rPr lang="en-US" sz="2000" dirty="0" smtClean="0"/>
-              <a:t> to its consumers</a:t>
-            </a:r>
-          </a:p>
-          <a:p>
-            <a:pPr lvl="1"/>
-            <a:r>
-              <a:rPr lang="en-US" sz="2000" dirty="0" smtClean="0"/>
-              <a:t>as the </a:t>
-            </a:r>
-            <a:r>
-              <a:rPr lang="en-US" sz="2000" u="sng" dirty="0" smtClean="0"/>
-              <a:t>application behavior</a:t>
-            </a:r>
-            <a:r>
-              <a:rPr lang="en-US" sz="2000" dirty="0" smtClean="0"/>
-              <a:t> depends on the flow of the traffic among </a:t>
-            </a:r>
-            <a:r>
-              <a:rPr lang="en-US" sz="2000" dirty="0" err="1" smtClean="0"/>
-              <a:t>microservices</a:t>
-            </a:r>
-            <a:r>
-              <a:rPr lang="en-US" sz="2000" dirty="0" smtClean="0"/>
-              <a:t>, </a:t>
-            </a:r>
-            <a:r>
-              <a:rPr lang="en-US" sz="2000" i="1" dirty="0" smtClean="0">
-                <a:solidFill>
-                  <a:srgbClr val="C00000"/>
-                </a:solidFill>
-              </a:rPr>
-              <a:t>traffic control</a:t>
-            </a:r>
-            <a:r>
-              <a:rPr lang="en-US" sz="2000" dirty="0" smtClean="0"/>
-              <a:t> becomes a must (but currently missing) for runtime operation.</a:t>
-            </a:r>
-            <a:endParaRPr lang="en-US" sz="2000" dirty="0"/>
-          </a:p>
-        </p:txBody>
-      </p:sp>
-    </p:spTree>
-  </p:cSld>
-  <p:clrMapOvr>
-    <a:masterClrMapping/>
-  </p:clrMapOvr>
-</p:sld>
-</file>
-
-<file path=ppt/slides/slide50.xml><?xml version="1.0" encoding="utf-8"?>
+<file path=ppt/slides/slide52.xml><?xml version="1.0" encoding="utf-8"?>
 <p:sld xmlns:a="http://schemas.openxmlformats.org/drawingml/2006/main" xmlns:r="http://schemas.openxmlformats.org/officeDocument/2006/relationships" xmlns:p="http://schemas.openxmlformats.org/presentationml/2006/main">
   <p:cSld>
     <p:spTree>
@@ -9126,7 +9411,7 @@
 </p:sld>
 </file>
 
-<file path=ppt/slides/slide51.xml><?xml version="1.0" encoding="utf-8"?>
+<file path=ppt/slides/slide53.xml><?xml version="1.0" encoding="utf-8"?>
 <p:sld xmlns:a="http://schemas.openxmlformats.org/drawingml/2006/main" xmlns:r="http://schemas.openxmlformats.org/officeDocument/2006/relationships" xmlns:p="http://schemas.openxmlformats.org/presentationml/2006/main">
   <p:cSld>
     <p:spTree>
@@ -9230,7 +9515,7 @@
 </p:sld>
 </file>
 
-<file path=ppt/slides/slide52.xml><?xml version="1.0" encoding="utf-8"?>
+<file path=ppt/slides/slide54.xml><?xml version="1.0" encoding="utf-8"?>
 <p:sld xmlns:a="http://schemas.openxmlformats.org/drawingml/2006/main" xmlns:r="http://schemas.openxmlformats.org/officeDocument/2006/relationships" xmlns:p="http://schemas.openxmlformats.org/presentationml/2006/main">
   <p:cSld>
     <p:spTree>
@@ -9363,7 +9648,7 @@
 </p:sld>
 </file>
 
-<file path=ppt/slides/slide53.xml><?xml version="1.0" encoding="utf-8"?>
+<file path=ppt/slides/slide55.xml><?xml version="1.0" encoding="utf-8"?>
 <p:sld xmlns:a="http://schemas.openxmlformats.org/drawingml/2006/main" xmlns:r="http://schemas.openxmlformats.org/officeDocument/2006/relationships" xmlns:p="http://schemas.openxmlformats.org/presentationml/2006/main">
   <p:cSld>
     <p:spTree>
@@ -9482,7 +9767,7 @@
           <a:p>
             <a:r>
               <a:rPr lang="en-US" dirty="0" smtClean="0"/>
-              <a:t>Introduction to Service Mesh</a:t>
+              <a:t>The Definition of Service Mesh</a:t>
             </a:r>
             <a:endParaRPr lang="en-US" dirty="0"/>
           </a:p>
@@ -9513,25 +9798,33 @@
                   <a:srgbClr val="C00000"/>
                 </a:solidFill>
               </a:rPr>
+              <a:t>service mesh</a:t>
+            </a:r>
+            <a:r>
+              <a:rPr lang="en-US" sz="2400" dirty="0" smtClean="0"/>
+              <a:t> is a </a:t>
+            </a:r>
+            <a:r>
+              <a:rPr lang="en-US" sz="2400" u="sng" dirty="0" smtClean="0"/>
               <a:t>dedicated infrastructure layer</a:t>
             </a:r>
             <a:r>
               <a:rPr lang="en-US" sz="2400" dirty="0" smtClean="0"/>
-              <a:t> over </a:t>
-            </a:r>
-            <a:r>
-              <a:rPr lang="en-US" sz="2400" dirty="0" err="1" smtClean="0"/>
-              <a:t>microservices</a:t>
+              <a:t> for handling </a:t>
+            </a:r>
+            <a:r>
+              <a:rPr lang="en-US" sz="2400" u="sng" dirty="0" smtClean="0"/>
+              <a:t>service-to-service communication</a:t>
             </a:r>
             <a:r>
               <a:rPr lang="en-US" sz="2400" dirty="0" smtClean="0"/>
-              <a:t> without imposing modification on the service implementations.</a:t>
+              <a:t>.</a:t>
             </a:r>
           </a:p>
           <a:p>
             <a:r>
               <a:rPr lang="en-US" sz="2400" dirty="0" smtClean="0"/>
-              <a:t>Serving as a fully manageable </a:t>
+              <a:t>It’s responsible for the </a:t>
             </a:r>
             <a:r>
               <a:rPr lang="en-US" sz="2400" i="1" dirty="0" smtClean="0">
@@ -9539,60 +9832,29 @@
                   <a:srgbClr val="C00000"/>
                 </a:solidFill>
               </a:rPr>
-              <a:t>service-to-service communication platform</a:t>
+              <a:t>reliable delivery of requests</a:t>
             </a:r>
             <a:r>
               <a:rPr lang="en-US" sz="2400" dirty="0" smtClean="0"/>
-              <a:t>, a service mesh is designed to </a:t>
-            </a:r>
-            <a:r>
-              <a:rPr lang="en-US" sz="2400" u="sng" dirty="0" smtClean="0"/>
-              <a:t>standardize</a:t>
-            </a:r>
+              <a:t> through the complex topology of services that comprise a modern, cloud native application.</a:t>
+            </a:r>
+          </a:p>
+          <a:p>
             <a:r>
               <a:rPr lang="en-US" sz="2400" dirty="0" smtClean="0"/>
-              <a:t> the runtime operations of applications.</a:t>
-            </a:r>
-          </a:p>
-          <a:p>
+              <a:t>In practice, the service mesh is typically implemented as an array of lightweight network proxies that are </a:t>
+            </a:r>
+            <a:r>
+              <a:rPr lang="en-US" sz="2400" i="1" dirty="0" smtClean="0">
+                <a:solidFill>
+                  <a:srgbClr val="C00000"/>
+                </a:solidFill>
+              </a:rPr>
+              <a:t>deployed alongside application code</a:t>
+            </a:r>
             <a:r>
               <a:rPr lang="en-US" sz="2400" dirty="0" smtClean="0"/>
-              <a:t>The service mesh technologies hold the promise in addressing</a:t>
-            </a:r>
-          </a:p>
-          <a:p>
-            <a:pPr lvl="1"/>
-            <a:r>
-              <a:rPr lang="en-US" sz="2000" dirty="0" smtClean="0"/>
-              <a:t>communication-related concerns</a:t>
-            </a:r>
-          </a:p>
-          <a:p>
-            <a:pPr lvl="1"/>
-            <a:r>
-              <a:rPr lang="en-US" sz="2000" dirty="0" smtClean="0"/>
-              <a:t>interoperability</a:t>
-            </a:r>
-          </a:p>
-          <a:p>
-            <a:pPr lvl="1"/>
-            <a:r>
-              <a:rPr lang="en-US" sz="2000" dirty="0" smtClean="0"/>
-              <a:t>traffic segmentation</a:t>
-            </a:r>
-          </a:p>
-          <a:p>
-            <a:pPr lvl="1"/>
-            <a:r>
-              <a:rPr lang="en-US" sz="2000" dirty="0" smtClean="0"/>
-              <a:t>dependency control</a:t>
-            </a:r>
-          </a:p>
-          <a:p>
-            <a:pPr lvl="1"/>
-            <a:r>
-              <a:rPr lang="en-US" sz="2000" dirty="0" smtClean="0"/>
-              <a:t>runtime enforcement</a:t>
+              <a:t>, without the application needing to be aware.</a:t>
             </a:r>
             <a:endParaRPr lang="en-US" sz="2000" dirty="0"/>
           </a:p>
@@ -9639,89 +9901,6 @@
           <a:lstStyle/>
           <a:p>
             <a:r>
-              <a:rPr lang="en-US" dirty="0" smtClean="0"/>
-              <a:t>The Definition of Service Mesh</a:t>
-            </a:r>
-            <a:endParaRPr lang="en-US" dirty="0"/>
-          </a:p>
-        </p:txBody>
-      </p:sp>
-      <p:sp>
-        <p:nvSpPr>
-          <p:cNvPr id="3" name="Content Placeholder 2"/>
-          <p:cNvSpPr>
-            <a:spLocks noGrp="1"/>
-          </p:cNvSpPr>
-          <p:nvPr>
-            <p:ph idx="1"/>
-          </p:nvPr>
-        </p:nvSpPr>
-        <p:spPr/>
-        <p:txBody>
-          <a:bodyPr/>
-          <a:lstStyle/>
-          <a:p>
-            <a:r>
-              <a:rPr lang="en-US" sz="2400" dirty="0" smtClean="0"/>
-              <a:t>A service mesh is a dedicated infrastructure layer for handling service-to-service communication.</a:t>
-            </a:r>
-          </a:p>
-          <a:p>
-            <a:r>
-              <a:rPr lang="en-US" sz="2400" dirty="0" smtClean="0"/>
-              <a:t>It’s responsible for the reliable delivery of requests through the complex topology of services that comprise a modern, cloud native application.</a:t>
-            </a:r>
-          </a:p>
-          <a:p>
-            <a:r>
-              <a:rPr lang="en-US" sz="2400" dirty="0" smtClean="0"/>
-              <a:t>In practice, the service mesh is typically implemented as an array of lightweight network proxies that are deployed alongside application code, without the application needing to be aware.</a:t>
-            </a:r>
-            <a:endParaRPr lang="en-US" sz="2000" dirty="0"/>
-          </a:p>
-        </p:txBody>
-      </p:sp>
-    </p:spTree>
-  </p:cSld>
-  <p:clrMapOvr>
-    <a:masterClrMapping/>
-  </p:clrMapOvr>
-</p:sld>
-</file>
-
-<file path=ppt/slides/slide8.xml><?xml version="1.0" encoding="utf-8"?>
-<p:sld xmlns:a="http://schemas.openxmlformats.org/drawingml/2006/main" xmlns:r="http://schemas.openxmlformats.org/officeDocument/2006/relationships" xmlns:p="http://schemas.openxmlformats.org/presentationml/2006/main">
-  <p:cSld>
-    <p:spTree>
-      <p:nvGrpSpPr>
-        <p:cNvPr id="1" name=""/>
-        <p:cNvGrpSpPr/>
-        <p:nvPr/>
-      </p:nvGrpSpPr>
-      <p:grpSpPr>
-        <a:xfrm>
-          <a:off x="0" y="0"/>
-          <a:ext cx="0" cy="0"/>
-          <a:chOff x="0" y="0"/>
-          <a:chExt cx="0" cy="0"/>
-        </a:xfrm>
-      </p:grpSpPr>
-      <p:sp>
-        <p:nvSpPr>
-          <p:cNvPr id="2" name="Title 1"/>
-          <p:cNvSpPr>
-            <a:spLocks noGrp="1"/>
-          </p:cNvSpPr>
-          <p:nvPr>
-            <p:ph type="title"/>
-          </p:nvPr>
-        </p:nvSpPr>
-        <p:spPr/>
-        <p:txBody>
-          <a:bodyPr/>
-          <a:lstStyle/>
-          <a:p>
-            <a:r>
               <a:rPr lang="en-US" sz="3800" dirty="0" smtClean="0"/>
               <a:t>Architectural Overview of Service Mesh</a:t>
             </a:r>
@@ -9746,19 +9925,87 @@
           <a:p>
             <a:r>
               <a:rPr lang="en-US" sz="2000" dirty="0" smtClean="0"/>
-              <a:t>A service mesh infrastructure logically consists of a data plane and a control plane.</a:t>
-            </a:r>
-          </a:p>
-          <a:p>
+              <a:t>A </a:t>
+            </a:r>
+            <a:r>
+              <a:rPr lang="en-US" sz="2000" i="1" dirty="0" smtClean="0">
+                <a:solidFill>
+                  <a:srgbClr val="C00000"/>
+                </a:solidFill>
+              </a:rPr>
+              <a:t>service mesh infrastructure</a:t>
+            </a:r>
             <a:r>
               <a:rPr lang="en-US" sz="2000" dirty="0" smtClean="0"/>
-              <a:t>The data plane is composed of a set of intelligent proxies, which are typically deployed as sidecars.</a:t>
-            </a:r>
-          </a:p>
-          <a:p>
+              <a:t> logically consists of a </a:t>
+            </a:r>
+            <a:r>
+              <a:rPr lang="en-US" sz="2000" u="sng" dirty="0" smtClean="0"/>
+              <a:t>data plane</a:t>
+            </a:r>
             <a:r>
               <a:rPr lang="en-US" sz="2000" dirty="0" smtClean="0"/>
-              <a:t>The control plane manages and configures the proxies for traffic routing.</a:t>
+              <a:t> and a </a:t>
+            </a:r>
+            <a:r>
+              <a:rPr lang="en-US" sz="2000" u="sng" dirty="0" smtClean="0"/>
+              <a:t>control plane</a:t>
+            </a:r>
+            <a:r>
+              <a:rPr lang="en-US" sz="2000" dirty="0" smtClean="0"/>
+              <a:t>.</a:t>
+            </a:r>
+          </a:p>
+          <a:p>
+            <a:r>
+              <a:rPr lang="en-US" sz="2000" dirty="0" smtClean="0"/>
+              <a:t>The data plane is composed of a set of </a:t>
+            </a:r>
+            <a:r>
+              <a:rPr lang="en-US" sz="2000" i="1" dirty="0" smtClean="0">
+                <a:solidFill>
+                  <a:srgbClr val="C00000"/>
+                </a:solidFill>
+              </a:rPr>
+              <a:t>intelligent proxies</a:t>
+            </a:r>
+            <a:r>
+              <a:rPr lang="en-US" sz="2000" dirty="0" smtClean="0"/>
+              <a:t>, which are typically deployed as </a:t>
+            </a:r>
+            <a:r>
+              <a:rPr lang="en-US" sz="2000" u="sng" dirty="0" smtClean="0"/>
+              <a:t>sidecars</a:t>
+            </a:r>
+            <a:r>
+              <a:rPr lang="en-US" sz="2000" dirty="0" smtClean="0"/>
+              <a:t>.</a:t>
+            </a:r>
+          </a:p>
+          <a:p>
+            <a:r>
+              <a:rPr lang="en-US" sz="2000" dirty="0" smtClean="0"/>
+              <a:t>The control plane </a:t>
+            </a:r>
+            <a:r>
+              <a:rPr lang="en-US" sz="2000" i="1" dirty="0" smtClean="0">
+                <a:solidFill>
+                  <a:srgbClr val="C00000"/>
+                </a:solidFill>
+              </a:rPr>
+              <a:t>manages</a:t>
+            </a:r>
+            <a:r>
+              <a:rPr lang="en-US" sz="2000" dirty="0" smtClean="0"/>
+              <a:t> and configures the proxies for </a:t>
+            </a:r>
+            <a:r>
+              <a:rPr lang="en-US" sz="2000" u="sng" dirty="0" smtClean="0"/>
+              <a:t>traffic routing</a:t>
+            </a:r>
+            <a:r>
+              <a:rPr lang="en-US" sz="2000" dirty="0" smtClean="0"/>
+              <a:t>.</a:t>
             </a:r>
             <a:endParaRPr lang="en-US" sz="2000" dirty="0"/>
           </a:p>
@@ -9804,6 +10051,114 @@
 </p:sld>
 </file>
 
+<file path=ppt/slides/slide8.xml><?xml version="1.0" encoding="utf-8"?>
+<p:sld xmlns:a="http://schemas.openxmlformats.org/drawingml/2006/main" xmlns:r="http://schemas.openxmlformats.org/officeDocument/2006/relationships" xmlns:p="http://schemas.openxmlformats.org/presentationml/2006/main">
+  <p:cSld>
+    <p:spTree>
+      <p:nvGrpSpPr>
+        <p:cNvPr id="1" name=""/>
+        <p:cNvGrpSpPr/>
+        <p:nvPr/>
+      </p:nvGrpSpPr>
+      <p:grpSpPr>
+        <a:xfrm>
+          <a:off x="0" y="0"/>
+          <a:ext cx="0" cy="0"/>
+          <a:chOff x="0" y="0"/>
+          <a:chExt cx="0" cy="0"/>
+        </a:xfrm>
+      </p:grpSpPr>
+      <p:sp>
+        <p:nvSpPr>
+          <p:cNvPr id="2" name="Title 1"/>
+          <p:cNvSpPr>
+            <a:spLocks noGrp="1"/>
+          </p:cNvSpPr>
+          <p:nvPr>
+            <p:ph type="title"/>
+          </p:nvPr>
+        </p:nvSpPr>
+        <p:spPr/>
+        <p:txBody>
+          <a:bodyPr/>
+          <a:lstStyle/>
+          <a:p>
+            <a:r>
+              <a:rPr lang="en-US" dirty="0" smtClean="0"/>
+              <a:t>Service Mesh Features</a:t>
+            </a:r>
+            <a:endParaRPr lang="en-US" dirty="0"/>
+          </a:p>
+        </p:txBody>
+      </p:sp>
+      <p:sp>
+        <p:nvSpPr>
+          <p:cNvPr id="3" name="Content Placeholder 2"/>
+          <p:cNvSpPr>
+            <a:spLocks noGrp="1"/>
+          </p:cNvSpPr>
+          <p:nvPr>
+            <p:ph idx="1"/>
+          </p:nvPr>
+        </p:nvSpPr>
+        <p:spPr/>
+        <p:txBody>
+          <a:bodyPr/>
+          <a:lstStyle/>
+          <a:p>
+            <a:r>
+              <a:rPr lang="en-US" sz="2800" dirty="0" smtClean="0"/>
+              <a:t>Service discovery</a:t>
+            </a:r>
+          </a:p>
+          <a:p>
+            <a:pPr lvl="1"/>
+            <a:r>
+              <a:rPr lang="en-US" sz="2400" dirty="0" smtClean="0"/>
+              <a:t>Typically, service instances are discovered by looking up a registry underneath which keeps records of new instances as well as instances that are removed from the network.</a:t>
+            </a:r>
+          </a:p>
+          <a:p>
+            <a:r>
+              <a:rPr lang="en-US" sz="2800" dirty="0" smtClean="0"/>
+              <a:t>Load balancing</a:t>
+            </a:r>
+          </a:p>
+          <a:p>
+            <a:r>
+              <a:rPr lang="en-US" sz="2800" dirty="0" smtClean="0"/>
+              <a:t>Fault tolerance</a:t>
+            </a:r>
+          </a:p>
+          <a:p>
+            <a:r>
+              <a:rPr lang="en-US" sz="2800" dirty="0" smtClean="0"/>
+              <a:t>Traffic monitoring</a:t>
+            </a:r>
+          </a:p>
+          <a:p>
+            <a:r>
+              <a:rPr lang="en-US" sz="2800" dirty="0" smtClean="0"/>
+              <a:t>Circuit breaking</a:t>
+            </a:r>
+          </a:p>
+          <a:p>
+            <a:r>
+              <a:rPr lang="en-US" sz="2800" dirty="0" smtClean="0"/>
+              <a:t>Authentication and access control</a:t>
+            </a:r>
+            <a:endParaRPr lang="en-US" sz="2800" dirty="0"/>
+          </a:p>
+        </p:txBody>
+      </p:sp>
+    </p:spTree>
+  </p:cSld>
+  <p:clrMapOvr>
+    <a:masterClrMapping/>
+  </p:clrMapOvr>
+</p:sld>
+</file>
+
 <file path=ppt/slides/slide9.xml><?xml version="1.0" encoding="utf-8"?>
 <p:sld xmlns:a="http://schemas.openxmlformats.org/drawingml/2006/main" xmlns:r="http://schemas.openxmlformats.org/officeDocument/2006/relationships" xmlns:p="http://schemas.openxmlformats.org/presentationml/2006/main">
   <p:cSld>
@@ -9838,7 +10193,7 @@
           <a:p>
             <a:r>
               <a:rPr lang="en-US" dirty="0" smtClean="0"/>
-              <a:t>Service Mesh Features</a:t>
+              <a:t>Enablement Technologies</a:t>
             </a:r>
             <a:endParaRPr lang="en-US" dirty="0"/>
           </a:p>
@@ -9860,47 +10215,80 @@
           <a:lstStyle/>
           <a:p>
             <a:r>
+              <a:rPr lang="en-US" sz="2400" dirty="0" err="1" smtClean="0"/>
+              <a:t>Istio</a:t>
+            </a:r>
+            <a:endParaRPr lang="en-US" sz="2400" dirty="0" smtClean="0"/>
+          </a:p>
+          <a:p>
+            <a:r>
+              <a:rPr lang="en-US" sz="2400" dirty="0" err="1" smtClean="0"/>
+              <a:t>Linkerd</a:t>
+            </a:r>
+            <a:endParaRPr lang="en-US" sz="2400" dirty="0" smtClean="0"/>
+          </a:p>
+          <a:p>
+            <a:r>
+              <a:rPr lang="en-US" sz="2400" dirty="0" err="1" smtClean="0"/>
+              <a:t>Airbnb</a:t>
+            </a:r>
+            <a:r>
               <a:rPr lang="en-US" sz="2400" dirty="0" smtClean="0"/>
-              <a:t>Service discovery</a:t>
+              <a:t> Synapse</a:t>
             </a:r>
           </a:p>
           <a:p>
             <a:pPr lvl="1"/>
             <a:r>
               <a:rPr lang="en-US" sz="2000" dirty="0" smtClean="0"/>
-              <a:t>Typically, service instances are discovered by looking up a registry underneath which keeps records of new instances as well as instances that are removed from the network.</a:t>
+              <a:t>it solves the problem of automated failover through a simplistic but efficient, </a:t>
+            </a:r>
+            <a:r>
+              <a:rPr lang="en-US" sz="2000" dirty="0" err="1" smtClean="0"/>
+              <a:t>Zookeeperbased</a:t>
+            </a:r>
+            <a:r>
+              <a:rPr lang="en-US" sz="2000" dirty="0" smtClean="0"/>
+              <a:t> service discovery mechanism. In detail, Synapse configures a local </a:t>
+            </a:r>
+            <a:r>
+              <a:rPr lang="en-US" sz="2000" dirty="0" err="1" smtClean="0"/>
+              <a:t>HAProxy</a:t>
+            </a:r>
+            <a:r>
+              <a:rPr lang="en-US" sz="2000" dirty="0" smtClean="0"/>
+              <a:t> process using the information read from Zookeeper where states of the services are stored and continuously updated. By doing so, the local </a:t>
+            </a:r>
+            <a:r>
+              <a:rPr lang="en-US" sz="2000" dirty="0" err="1" smtClean="0"/>
+              <a:t>HAProxy</a:t>
+            </a:r>
+            <a:r>
+              <a:rPr lang="en-US" sz="2000" dirty="0" smtClean="0"/>
+              <a:t> can take care of properly routing the request from a service consumer. With an optimized </a:t>
+            </a:r>
+            <a:r>
+              <a:rPr lang="en-US" sz="2000" dirty="0" err="1" smtClean="0"/>
+              <a:t>HAProxy</a:t>
+            </a:r>
+            <a:r>
+              <a:rPr lang="en-US" sz="2000" dirty="0" smtClean="0"/>
+              <a:t>, Synapse can react to the change (e.g., service failure) in Zookeeper, and reconfigure </a:t>
+            </a:r>
+            <a:r>
+              <a:rPr lang="en-US" sz="2000" dirty="0" err="1" smtClean="0"/>
+              <a:t>HAProxy</a:t>
+            </a:r>
+            <a:r>
+              <a:rPr lang="en-US" sz="2000" dirty="0" smtClean="0"/>
+              <a:t> immediately.</a:t>
             </a:r>
           </a:p>
           <a:p>
             <a:r>
               <a:rPr lang="en-US" sz="2400" dirty="0" smtClean="0"/>
-              <a:t>Load balancing</a:t>
-            </a:r>
-          </a:p>
-          <a:p>
-            <a:r>
-              <a:rPr lang="en-US" sz="2400" dirty="0" smtClean="0"/>
-              <a:t>Fault tolerance</a:t>
-            </a:r>
-          </a:p>
-          <a:p>
-            <a:r>
-              <a:rPr lang="en-US" sz="2400" dirty="0" smtClean="0"/>
-              <a:t>Traffic monitoring</a:t>
-            </a:r>
-          </a:p>
-          <a:p>
-            <a:r>
-              <a:rPr lang="en-US" sz="2400" dirty="0" smtClean="0"/>
-              <a:t>Circuit breaking</a:t>
-            </a:r>
-          </a:p>
-          <a:p>
-            <a:r>
-              <a:rPr lang="en-US" sz="2400" dirty="0" smtClean="0"/>
-              <a:t>Authentication and access control</a:t>
-            </a:r>
-            <a:endParaRPr lang="en-US" sz="2400" dirty="0"/>
+              <a:t>Amazon App Mesh</a:t>
+            </a:r>
           </a:p>
         </p:txBody>
       </p:sp>
